--- a/3.2 Hoofdstuk 2 - Marktvormen en hun marktevenwicht/3.2.2 Paragraaf 2 - Volkomen concurrentie/2. Leren/3.2.2 Volkomen concurrentie – presentatie.pptx
+++ b/3.2 Hoofdstuk 2 - Marktvormen en hun marktevenwicht/3.2.2 Paragraaf 2 - Volkomen concurrentie/2. Leren/3.2.2 Volkomen concurrentie – presentatie.pptx
@@ -16,9 +16,12 @@
     <p:sldId id="264" r:id="rId10"/>
     <p:sldId id="265" r:id="rId11"/>
     <p:sldId id="266" r:id="rId12"/>
+    <p:sldId id="267" r:id="rId13"/>
+    <p:sldId id="268" r:id="rId14"/>
+    <p:sldId id="269" r:id="rId15"/>
   </p:sldIdLst>
   <p:notesMasterIdLst>
-    <p:notesMasterId r:id="rId13"/>
+    <p:notesMasterId r:id="rId16"/>
   </p:notesMasterIdLst>
   <p:sldSz cx="9144000" cy="5143500"/>
   <p:notesSz cx="5143500" cy="9144000"/>
@@ -600,7 +603,7 @@
           <a:p>
             <a:r>
               <a:rPr lang="en-US" dirty="0"/>
-              <a:t>De lange-termijnberekening: stel MK = GTK (nulwinst). Los op naar q en p. Op lange termijn produceert elke aanbieder 16 stuks tegen een prijs van 26 euro.</a:t>
+              <a:t>Het blauwe vlak is het consumentensurplus: het voordeel van consumenten die minder betalen dan hun maximale bereidheid. Het groene vlak is het producentensurplus. Beide zijn driehoeken: ½ × basis × hoogte.</a:t>
             </a:r>
             <a:endParaRPr lang="en-US" dirty="0"/>
           </a:p>
@@ -688,7 +691,7 @@
           <a:p>
             <a:r>
               <a:rPr lang="en-US" dirty="0"/>
-              <a:t>Vijf kernpunten. Van individueel naar collectief aanbod, het evenwicht, winstberekening, surplus en de lange termijn. Controleer of leerlingen de stappen zelfstandig kunnen doorlopen.</a:t>
+              <a:t>Op de lange termijn treden nieuwe bedrijven toe zolang er winst te behalen is. Dit verhoogt het aanbod, drukt de prijs, en uiteindelijk is de winst nul. Dan geldt: p = GTK(min).</a:t>
             </a:r>
             <a:endParaRPr lang="en-US" dirty="0"/>
           </a:p>
@@ -712,6 +715,270 @@
             <a:fld id="{F7021451-1387-4CA6-816F-3879F97B5CBC}" type="slidenum">
               <a:rPr lang="en-US"/>
               <a:t>11</a:t>
+            </a:fld>
+            <a:endParaRPr lang="en-US"/>
+          </a:p>
+        </p:txBody>
+      </p:sp>
+    </p:spTree>
+    <p:extLst>
+      <p:ext uri="{BB962C8B-B14F-4D97-AF65-F5344CB8AC3E}">
+        <p14:creationId xmlns:p14="http://schemas.microsoft.com/office/powerpoint/2010/main" val="1024086991"/>
+      </p:ext>
+    </p:extLst>
+  </p:cSld>
+  <p:clrMapOvr>
+    <a:masterClrMapping/>
+  </p:clrMapOvr>
+</p:notes>
+</file>
+
+<file path=ppt/notesSlides/notesSlide12.xml><?xml version="1.0" encoding="utf-8"?>
+<p:notes xmlns:a="http://schemas.openxmlformats.org/drawingml/2006/main" xmlns:r="http://schemas.openxmlformats.org/officeDocument/2006/relationships" xmlns:p="http://schemas.openxmlformats.org/presentationml/2006/main">
+  <p:cSld>
+    <p:spTree>
+      <p:nvGrpSpPr>
+        <p:cNvPr id="1" name=""/>
+        <p:cNvGrpSpPr/>
+        <p:nvPr/>
+      </p:nvGrpSpPr>
+      <p:grpSpPr>
+        <a:xfrm>
+          <a:off x="0" y="0"/>
+          <a:ext cx="0" cy="0"/>
+          <a:chOff x="0" y="0"/>
+          <a:chExt cx="0" cy="0"/>
+        </a:xfrm>
+      </p:grpSpPr>
+      <p:sp>
+        <p:nvSpPr>
+          <p:cNvPr id="2" name="Slide Image Placeholder 1"/>
+          <p:cNvSpPr>
+            <a:spLocks noGrp="1" noRot="1" noChangeAspect="1"/>
+          </p:cNvSpPr>
+          <p:nvPr>
+            <p:ph type="sldImg"/>
+          </p:nvPr>
+        </p:nvSpPr>
+        <p:spPr/>
+      </p:sp>
+      <p:sp>
+        <p:nvSpPr>
+          <p:cNvPr id="3" name="Notes Placeholder 2"/>
+          <p:cNvSpPr>
+            <a:spLocks noGrp="1"/>
+          </p:cNvSpPr>
+          <p:nvPr>
+            <p:ph type="body" idx="1"/>
+          </p:nvPr>
+        </p:nvSpPr>
+        <p:spPr/>
+        <p:txBody>
+          <a:bodyPr/>
+          <a:lstStyle/>
+          <a:p>
+            <a:r>
+              <a:rPr lang="en-US" dirty="0"/>
+              <a:t>De lange-termijnberekening: stel MK = GTK (nulwinst). Los op naar q en p. Op lange termijn produceert elke aanbieder 16 stuks tegen een prijs van 26 euro.</a:t>
+            </a:r>
+            <a:endParaRPr lang="en-US" dirty="0"/>
+          </a:p>
+        </p:txBody>
+      </p:sp>
+      <p:sp>
+        <p:nvSpPr>
+          <p:cNvPr id="4" name="Slide Number Placeholder 3"/>
+          <p:cNvSpPr>
+            <a:spLocks noGrp="1"/>
+          </p:cNvSpPr>
+          <p:nvPr>
+            <p:ph type="sldNum" sz="quarter" idx="10"/>
+          </p:nvPr>
+        </p:nvSpPr>
+        <p:spPr/>
+        <p:txBody>
+          <a:bodyPr/>
+          <a:lstStyle/>
+          <a:p>
+            <a:fld id="{F7021451-1387-4CA6-816F-3879F97B5CBC}" type="slidenum">
+              <a:rPr lang="en-US"/>
+              <a:t>12</a:t>
+            </a:fld>
+            <a:endParaRPr lang="en-US"/>
+          </a:p>
+        </p:txBody>
+      </p:sp>
+    </p:spTree>
+    <p:extLst>
+      <p:ext uri="{BB962C8B-B14F-4D97-AF65-F5344CB8AC3E}">
+        <p14:creationId xmlns:p14="http://schemas.microsoft.com/office/powerpoint/2010/main" val="1024086991"/>
+      </p:ext>
+    </p:extLst>
+  </p:cSld>
+  <p:clrMapOvr>
+    <a:masterClrMapping/>
+  </p:clrMapOvr>
+</p:notes>
+</file>
+
+<file path=ppt/notesSlides/notesSlide13.xml><?xml version="1.0" encoding="utf-8"?>
+<p:notes xmlns:a="http://schemas.openxmlformats.org/drawingml/2006/main" xmlns:r="http://schemas.openxmlformats.org/officeDocument/2006/relationships" xmlns:p="http://schemas.openxmlformats.org/presentationml/2006/main">
+  <p:cSld>
+    <p:spTree>
+      <p:nvGrpSpPr>
+        <p:cNvPr id="1" name=""/>
+        <p:cNvGrpSpPr/>
+        <p:nvPr/>
+      </p:nvGrpSpPr>
+      <p:grpSpPr>
+        <a:xfrm>
+          <a:off x="0" y="0"/>
+          <a:ext cx="0" cy="0"/>
+          <a:chOff x="0" y="0"/>
+          <a:chExt cx="0" cy="0"/>
+        </a:xfrm>
+      </p:grpSpPr>
+      <p:sp>
+        <p:nvSpPr>
+          <p:cNvPr id="2" name="Slide Image Placeholder 1"/>
+          <p:cNvSpPr>
+            <a:spLocks noGrp="1" noRot="1" noChangeAspect="1"/>
+          </p:cNvSpPr>
+          <p:nvPr>
+            <p:ph type="sldImg"/>
+          </p:nvPr>
+        </p:nvSpPr>
+        <p:spPr/>
+      </p:sp>
+      <p:sp>
+        <p:nvSpPr>
+          <p:cNvPr id="3" name="Notes Placeholder 2"/>
+          <p:cNvSpPr>
+            <a:spLocks noGrp="1"/>
+          </p:cNvSpPr>
+          <p:nvPr>
+            <p:ph type="body" idx="1"/>
+          </p:nvPr>
+        </p:nvSpPr>
+        <p:spPr/>
+        <p:txBody>
+          <a:bodyPr/>
+          <a:lstStyle/>
+          <a:p>
+            <a:r>
+              <a:rPr lang="en-US" dirty="0"/>
+              <a:t>Op lange termijn daalt de prijs tot het minimum van de GTK-curve. De winst is nul: de prijslijn raakt de GTK precies op het laagste punt. Nieuwe bedrijven treden toe zolang er winst is, waardoor het aanbod stijgt en de prijs daalt.</a:t>
+            </a:r>
+            <a:endParaRPr lang="en-US" dirty="0"/>
+          </a:p>
+        </p:txBody>
+      </p:sp>
+      <p:sp>
+        <p:nvSpPr>
+          <p:cNvPr id="4" name="Slide Number Placeholder 3"/>
+          <p:cNvSpPr>
+            <a:spLocks noGrp="1"/>
+          </p:cNvSpPr>
+          <p:nvPr>
+            <p:ph type="sldNum" sz="quarter" idx="10"/>
+          </p:nvPr>
+        </p:nvSpPr>
+        <p:spPr/>
+        <p:txBody>
+          <a:bodyPr/>
+          <a:lstStyle/>
+          <a:p>
+            <a:fld id="{F7021451-1387-4CA6-816F-3879F97B5CBC}" type="slidenum">
+              <a:rPr lang="en-US"/>
+              <a:t>13</a:t>
+            </a:fld>
+            <a:endParaRPr lang="en-US"/>
+          </a:p>
+        </p:txBody>
+      </p:sp>
+    </p:spTree>
+    <p:extLst>
+      <p:ext uri="{BB962C8B-B14F-4D97-AF65-F5344CB8AC3E}">
+        <p14:creationId xmlns:p14="http://schemas.microsoft.com/office/powerpoint/2010/main" val="1024086991"/>
+      </p:ext>
+    </p:extLst>
+  </p:cSld>
+  <p:clrMapOvr>
+    <a:masterClrMapping/>
+  </p:clrMapOvr>
+</p:notes>
+</file>
+
+<file path=ppt/notesSlides/notesSlide14.xml><?xml version="1.0" encoding="utf-8"?>
+<p:notes xmlns:a="http://schemas.openxmlformats.org/drawingml/2006/main" xmlns:r="http://schemas.openxmlformats.org/officeDocument/2006/relationships" xmlns:p="http://schemas.openxmlformats.org/presentationml/2006/main">
+  <p:cSld>
+    <p:spTree>
+      <p:nvGrpSpPr>
+        <p:cNvPr id="1" name=""/>
+        <p:cNvGrpSpPr/>
+        <p:nvPr/>
+      </p:nvGrpSpPr>
+      <p:grpSpPr>
+        <a:xfrm>
+          <a:off x="0" y="0"/>
+          <a:ext cx="0" cy="0"/>
+          <a:chOff x="0" y="0"/>
+          <a:chExt cx="0" cy="0"/>
+        </a:xfrm>
+      </p:grpSpPr>
+      <p:sp>
+        <p:nvSpPr>
+          <p:cNvPr id="2" name="Slide Image Placeholder 1"/>
+          <p:cNvSpPr>
+            <a:spLocks noGrp="1" noRot="1" noChangeAspect="1"/>
+          </p:cNvSpPr>
+          <p:nvPr>
+            <p:ph type="sldImg"/>
+          </p:nvPr>
+        </p:nvSpPr>
+        <p:spPr/>
+      </p:sp>
+      <p:sp>
+        <p:nvSpPr>
+          <p:cNvPr id="3" name="Notes Placeholder 2"/>
+          <p:cNvSpPr>
+            <a:spLocks noGrp="1"/>
+          </p:cNvSpPr>
+          <p:nvPr>
+            <p:ph type="body" idx="1"/>
+          </p:nvPr>
+        </p:nvSpPr>
+        <p:spPr/>
+        <p:txBody>
+          <a:bodyPr/>
+          <a:lstStyle/>
+          <a:p>
+            <a:r>
+              <a:rPr lang="en-US" dirty="0"/>
+              <a:t>Vijf kernpunten. Van individueel naar collectief aanbod, het evenwicht, winstberekening, surplus en de lange termijn. Controleer of leerlingen de stappen zelfstandig kunnen doorlopen.</a:t>
+            </a:r>
+            <a:endParaRPr lang="en-US" dirty="0"/>
+          </a:p>
+        </p:txBody>
+      </p:sp>
+      <p:sp>
+        <p:nvSpPr>
+          <p:cNvPr id="4" name="Slide Number Placeholder 3"/>
+          <p:cNvSpPr>
+            <a:spLocks noGrp="1"/>
+          </p:cNvSpPr>
+          <p:nvPr>
+            <p:ph type="sldNum" sz="quarter" idx="10"/>
+          </p:nvPr>
+        </p:nvSpPr>
+        <p:spPr/>
+        <p:txBody>
+          <a:bodyPr/>
+          <a:lstStyle/>
+          <a:p>
+            <a:fld id="{F7021451-1387-4CA6-816F-3879F97B5CBC}" type="slidenum">
+              <a:rPr lang="en-US"/>
+              <a:t>14</a:t>
             </a:fld>
             <a:endParaRPr lang="en-US"/>
           </a:p>
@@ -1304,7 +1571,7 @@
           <a:p>
             <a:r>
               <a:rPr lang="en-US" dirty="0"/>
-              <a:t>Het consumentensurplus is het verschil tussen wat consumenten bereid waren te betalen en wat ze daadwerkelijk betalen. Het producentensurplus is het verschil tussen de ontvangen prijs en de minimale prijs waarvoor ze wilden verkopen.</a:t>
+              <a:t>De horizontale lijn is de marktprijs. Het bedrijf produceert waar P = MK, dat is bij q* = 20. De winst is de groene rechthoek: het verschil tussen prijs en GTK, vermenigvuldigd met q*. Winst = (30 − 26,4) × 20 = 72.</a:t>
             </a:r>
             <a:endParaRPr lang="en-US" dirty="0"/>
           </a:p>
@@ -1392,7 +1659,7 @@
           <a:p>
             <a:r>
               <a:rPr lang="en-US" dirty="0"/>
-              <a:t>Op de lange termijn treden nieuwe bedrijven toe zolang er winst te behalen is. Dit verhoogt het aanbod, drukt de prijs, en uiteindelijk is de winst nul. Dan geldt: p = GTKmin.</a:t>
+              <a:t>Het consumentensurplus is het verschil tussen wat consumenten bereid waren te betalen en wat ze daadwerkelijk betalen. Het producentensurplus is het verschil tussen de ontvangen prijs en de minimale prijs.</a:t>
             </a:r>
             <a:endParaRPr lang="en-US" dirty="0"/>
           </a:p>
@@ -2059,547 +2326,36 @@
                 <a:ea typeface="Arial" pitchFamily="34" charset="-122"/>
                 <a:cs typeface="Arial" pitchFamily="34" charset="-120"/>
               </a:rPr>
-              <a:t>Lange termijn: MK = GTK</a:t>
+              <a:t>CS en PS in de grafiek</a:t>
             </a:r>
             <a:endParaRPr lang="en-US" sz="2400" dirty="0"/>
           </a:p>
         </p:txBody>
       </p:sp>
-      <p:sp>
-        <p:nvSpPr>
-          <p:cNvPr id="3" name="Shape 1"/>
-          <p:cNvSpPr/>
-          <p:nvPr/>
-        </p:nvSpPr>
-        <p:spPr>
-          <a:xfrm>
-            <a:off x="640080" y="914400"/>
-            <a:ext cx="7863840" cy="594360"/>
-          </a:xfrm>
-          <a:prstGeom prst="rect">
-            <a:avLst/>
-          </a:prstGeom>
-          <a:solidFill>
-            <a:srgbClr val="F7F8FA"/>
-          </a:solidFill>
-          <a:ln w="6350">
-            <a:solidFill>
-              <a:srgbClr val="CBD5E0"/>
-            </a:solidFill>
-            <a:prstDash val="solid"/>
-          </a:ln>
-        </p:spPr>
-      </p:sp>
-      <p:sp>
-        <p:nvSpPr>
-          <p:cNvPr id="4" name="Text 2"/>
-          <p:cNvSpPr/>
-          <p:nvPr/>
-        </p:nvSpPr>
-        <p:spPr>
-          <a:xfrm>
-            <a:off x="868680" y="914400"/>
-            <a:ext cx="1828800" cy="594360"/>
-          </a:xfrm>
-          <a:prstGeom prst="rect">
-            <a:avLst/>
-          </a:prstGeom>
-          <a:noFill/>
-          <a:ln/>
-        </p:spPr>
-        <p:txBody>
-          <a:bodyPr wrap="square" rtlCol="0" anchor="ctr"/>
-          <a:lstStyle/>
-          <a:p>
-            <a:pPr indent="0" marL="0">
-              <a:buNone/>
-            </a:pPr>
-            <a:r>
-              <a:rPr lang="en-US" sz="1400" b="1" dirty="0">
-                <a:solidFill>
-                  <a:srgbClr val="718096"/>
-                </a:solidFill>
-                <a:latin typeface="Arial" pitchFamily="34" charset="0"/>
-                <a:ea typeface="Arial" pitchFamily="34" charset="-122"/>
-                <a:cs typeface="Arial" pitchFamily="34" charset="-120"/>
-              </a:rPr>
-              <a:t>Stel</a:t>
-            </a:r>
-            <a:endParaRPr lang="en-US" sz="1400" dirty="0"/>
-          </a:p>
-        </p:txBody>
-      </p:sp>
-      <p:sp>
-        <p:nvSpPr>
-          <p:cNvPr id="5" name="Text 3"/>
-          <p:cNvSpPr/>
-          <p:nvPr/>
-        </p:nvSpPr>
-        <p:spPr>
-          <a:xfrm>
-            <a:off x="2743200" y="914400"/>
-            <a:ext cx="5486400" cy="594360"/>
-          </a:xfrm>
-          <a:prstGeom prst="rect">
-            <a:avLst/>
-          </a:prstGeom>
-          <a:noFill/>
-          <a:ln/>
-        </p:spPr>
-        <p:txBody>
-          <a:bodyPr wrap="square" rtlCol="0" anchor="ctr"/>
-          <a:lstStyle/>
-          <a:p>
-            <a:pPr indent="0" marL="0">
-              <a:buNone/>
-            </a:pPr>
-            <a:r>
-              <a:rPr lang="en-US" sz="1600" dirty="0">
-                <a:solidFill>
-                  <a:srgbClr val="2D3748"/>
-                </a:solidFill>
-                <a:latin typeface="Consolas" pitchFamily="34" charset="0"/>
-                <a:ea typeface="Consolas" pitchFamily="34" charset="-122"/>
-                <a:cs typeface="Consolas" pitchFamily="34" charset="-120"/>
-              </a:rPr>
-              <a:t>MK = GTK  (geen winst, geen verlies)</a:t>
-            </a:r>
-            <a:endParaRPr lang="en-US" sz="1600" dirty="0"/>
-          </a:p>
-        </p:txBody>
-      </p:sp>
-      <p:sp>
-        <p:nvSpPr>
-          <p:cNvPr id="6" name="Shape 4"/>
-          <p:cNvSpPr/>
-          <p:nvPr/>
-        </p:nvSpPr>
-        <p:spPr>
-          <a:xfrm>
-            <a:off x="640080" y="1664208"/>
-            <a:ext cx="7863840" cy="594360"/>
-          </a:xfrm>
-          <a:prstGeom prst="rect">
-            <a:avLst/>
-          </a:prstGeom>
-          <a:solidFill>
-            <a:srgbClr val="F7F8FA"/>
-          </a:solidFill>
-          <a:ln w="6350">
-            <a:solidFill>
-              <a:srgbClr val="CBD5E0"/>
-            </a:solidFill>
-            <a:prstDash val="solid"/>
-          </a:ln>
-        </p:spPr>
-      </p:sp>
-      <p:sp>
-        <p:nvSpPr>
-          <p:cNvPr id="7" name="Text 5"/>
-          <p:cNvSpPr/>
-          <p:nvPr/>
-        </p:nvSpPr>
-        <p:spPr>
-          <a:xfrm>
-            <a:off x="868680" y="1664208"/>
-            <a:ext cx="1828800" cy="594360"/>
-          </a:xfrm>
-          <a:prstGeom prst="rect">
-            <a:avLst/>
-          </a:prstGeom>
-          <a:noFill/>
-          <a:ln/>
-        </p:spPr>
-        <p:txBody>
-          <a:bodyPr wrap="square" rtlCol="0" anchor="ctr"/>
-          <a:lstStyle/>
-          <a:p>
-            <a:pPr indent="0" marL="0">
-              <a:buNone/>
-            </a:pPr>
-            <a:r>
-              <a:rPr lang="en-US" sz="1400" b="1" dirty="0">
-                <a:solidFill>
-                  <a:srgbClr val="718096"/>
-                </a:solidFill>
-                <a:latin typeface="Arial" pitchFamily="34" charset="0"/>
-                <a:ea typeface="Arial" pitchFamily="34" charset="-122"/>
-                <a:cs typeface="Arial" pitchFamily="34" charset="-120"/>
-              </a:rPr>
-              <a:t>Invullen</a:t>
-            </a:r>
-            <a:endParaRPr lang="en-US" sz="1400" dirty="0"/>
-          </a:p>
-        </p:txBody>
-      </p:sp>
-      <p:sp>
-        <p:nvSpPr>
-          <p:cNvPr id="8" name="Text 6"/>
-          <p:cNvSpPr/>
-          <p:nvPr/>
-        </p:nvSpPr>
-        <p:spPr>
-          <a:xfrm>
-            <a:off x="2743200" y="1664208"/>
-            <a:ext cx="5486400" cy="594360"/>
-          </a:xfrm>
-          <a:prstGeom prst="rect">
-            <a:avLst/>
-          </a:prstGeom>
-          <a:noFill/>
-          <a:ln/>
-        </p:spPr>
-        <p:txBody>
-          <a:bodyPr wrap="square" rtlCol="0" anchor="ctr"/>
-          <a:lstStyle/>
-          <a:p>
-            <a:pPr indent="0" marL="0">
-              <a:buNone/>
-            </a:pPr>
-            <a:r>
-              <a:rPr lang="en-US" sz="1600" dirty="0">
-                <a:solidFill>
-                  <a:srgbClr val="2D3748"/>
-                </a:solidFill>
-                <a:latin typeface="Consolas" pitchFamily="34" charset="0"/>
-                <a:ea typeface="Consolas" pitchFamily="34" charset="-122"/>
-                <a:cs typeface="Consolas" pitchFamily="34" charset="-120"/>
-              </a:rPr>
-              <a:t>q + 10 = 0,5q + 10 + 128/q</a:t>
-            </a:r>
-            <a:endParaRPr lang="en-US" sz="1600" dirty="0"/>
-          </a:p>
-        </p:txBody>
-      </p:sp>
-      <p:sp>
-        <p:nvSpPr>
-          <p:cNvPr id="9" name="Shape 7"/>
-          <p:cNvSpPr/>
-          <p:nvPr/>
-        </p:nvSpPr>
-        <p:spPr>
-          <a:xfrm>
-            <a:off x="640080" y="2414016"/>
-            <a:ext cx="7863840" cy="594360"/>
-          </a:xfrm>
-          <a:prstGeom prst="rect">
-            <a:avLst/>
-          </a:prstGeom>
-          <a:solidFill>
-            <a:srgbClr val="F7F8FA"/>
-          </a:solidFill>
-          <a:ln w="6350">
-            <a:solidFill>
-              <a:srgbClr val="CBD5E0"/>
-            </a:solidFill>
-            <a:prstDash val="solid"/>
-          </a:ln>
-        </p:spPr>
-      </p:sp>
-      <p:sp>
-        <p:nvSpPr>
-          <p:cNvPr id="10" name="Text 8"/>
-          <p:cNvSpPr/>
-          <p:nvPr/>
-        </p:nvSpPr>
-        <p:spPr>
-          <a:xfrm>
-            <a:off x="868680" y="2414016"/>
-            <a:ext cx="1828800" cy="594360"/>
-          </a:xfrm>
-          <a:prstGeom prst="rect">
-            <a:avLst/>
-          </a:prstGeom>
-          <a:noFill/>
-          <a:ln/>
-        </p:spPr>
-        <p:txBody>
-          <a:bodyPr wrap="square" rtlCol="0" anchor="ctr"/>
-          <a:lstStyle/>
-          <a:p>
-            <a:pPr indent="0" marL="0">
-              <a:buNone/>
-            </a:pPr>
-            <a:r>
-              <a:rPr lang="en-US" sz="1400" b="1" dirty="0">
-                <a:solidFill>
-                  <a:srgbClr val="718096"/>
-                </a:solidFill>
-                <a:latin typeface="Arial" pitchFamily="34" charset="0"/>
-                <a:ea typeface="Arial" pitchFamily="34" charset="-122"/>
-                <a:cs typeface="Arial" pitchFamily="34" charset="-120"/>
-              </a:rPr>
-              <a:t>Vereenvoudig</a:t>
-            </a:r>
-            <a:endParaRPr lang="en-US" sz="1400" dirty="0"/>
-          </a:p>
-        </p:txBody>
-      </p:sp>
-      <p:sp>
-        <p:nvSpPr>
-          <p:cNvPr id="11" name="Text 9"/>
-          <p:cNvSpPr/>
-          <p:nvPr/>
-        </p:nvSpPr>
-        <p:spPr>
-          <a:xfrm>
-            <a:off x="2743200" y="2414016"/>
-            <a:ext cx="5486400" cy="594360"/>
-          </a:xfrm>
-          <a:prstGeom prst="rect">
-            <a:avLst/>
-          </a:prstGeom>
-          <a:noFill/>
-          <a:ln/>
-        </p:spPr>
-        <p:txBody>
-          <a:bodyPr wrap="square" rtlCol="0" anchor="ctr"/>
-          <a:lstStyle/>
-          <a:p>
-            <a:pPr indent="0" marL="0">
-              <a:buNone/>
-            </a:pPr>
-            <a:r>
-              <a:rPr lang="en-US" sz="1600" dirty="0">
-                <a:solidFill>
-                  <a:srgbClr val="2D3748"/>
-                </a:solidFill>
-                <a:latin typeface="Consolas" pitchFamily="34" charset="0"/>
-                <a:ea typeface="Consolas" pitchFamily="34" charset="-122"/>
-                <a:cs typeface="Consolas" pitchFamily="34" charset="-120"/>
-              </a:rPr>
-              <a:t>0,5q = 128/q  →  0,5q² = 128</a:t>
-            </a:r>
-            <a:endParaRPr lang="en-US" sz="1600" dirty="0"/>
-          </a:p>
-        </p:txBody>
-      </p:sp>
-      <p:sp>
-        <p:nvSpPr>
-          <p:cNvPr id="12" name="Shape 10"/>
-          <p:cNvSpPr/>
-          <p:nvPr/>
-        </p:nvSpPr>
-        <p:spPr>
-          <a:xfrm>
-            <a:off x="640080" y="3163824"/>
-            <a:ext cx="7863840" cy="594360"/>
-          </a:xfrm>
-          <a:prstGeom prst="rect">
-            <a:avLst/>
-          </a:prstGeom>
-          <a:solidFill>
-            <a:srgbClr val="F7F8FA"/>
-          </a:solidFill>
-          <a:ln w="6350">
-            <a:solidFill>
-              <a:srgbClr val="CBD5E0"/>
-            </a:solidFill>
-            <a:prstDash val="solid"/>
-          </a:ln>
-        </p:spPr>
-      </p:sp>
-      <p:sp>
-        <p:nvSpPr>
-          <p:cNvPr id="13" name="Text 11"/>
-          <p:cNvSpPr/>
-          <p:nvPr/>
-        </p:nvSpPr>
-        <p:spPr>
-          <a:xfrm>
-            <a:off x="868680" y="3163824"/>
-            <a:ext cx="1828800" cy="594360"/>
-          </a:xfrm>
-          <a:prstGeom prst="rect">
-            <a:avLst/>
-          </a:prstGeom>
-          <a:noFill/>
-          <a:ln/>
-        </p:spPr>
-        <p:txBody>
-          <a:bodyPr wrap="square" rtlCol="0" anchor="ctr"/>
-          <a:lstStyle/>
-          <a:p>
-            <a:pPr indent="0" marL="0">
-              <a:buNone/>
-            </a:pPr>
-            <a:r>
-              <a:rPr lang="en-US" sz="1400" b="1" dirty="0">
-                <a:solidFill>
-                  <a:srgbClr val="718096"/>
-                </a:solidFill>
-                <a:latin typeface="Arial" pitchFamily="34" charset="0"/>
-                <a:ea typeface="Arial" pitchFamily="34" charset="-122"/>
-                <a:cs typeface="Arial" pitchFamily="34" charset="-120"/>
-              </a:rPr>
-              <a:t>Oplossen</a:t>
-            </a:r>
-            <a:endParaRPr lang="en-US" sz="1400" dirty="0"/>
-          </a:p>
-        </p:txBody>
-      </p:sp>
-      <p:sp>
-        <p:nvSpPr>
-          <p:cNvPr id="14" name="Text 12"/>
-          <p:cNvSpPr/>
-          <p:nvPr/>
-        </p:nvSpPr>
-        <p:spPr>
-          <a:xfrm>
-            <a:off x="2743200" y="3163824"/>
-            <a:ext cx="5486400" cy="594360"/>
-          </a:xfrm>
-          <a:prstGeom prst="rect">
-            <a:avLst/>
-          </a:prstGeom>
-          <a:noFill/>
-          <a:ln/>
-        </p:spPr>
-        <p:txBody>
-          <a:bodyPr wrap="square" rtlCol="0" anchor="ctr"/>
-          <a:lstStyle/>
-          <a:p>
-            <a:pPr indent="0" marL="0">
-              <a:buNone/>
-            </a:pPr>
-            <a:r>
-              <a:rPr lang="en-US" sz="1600" dirty="0">
-                <a:solidFill>
-                  <a:srgbClr val="2D3748"/>
-                </a:solidFill>
-                <a:latin typeface="Consolas" pitchFamily="34" charset="0"/>
-                <a:ea typeface="Consolas" pitchFamily="34" charset="-122"/>
-                <a:cs typeface="Consolas" pitchFamily="34" charset="-120"/>
-              </a:rPr>
-              <a:t>q² = 256  →  q = 16</a:t>
-            </a:r>
-            <a:endParaRPr lang="en-US" sz="1600" dirty="0"/>
-          </a:p>
-        </p:txBody>
-      </p:sp>
-      <p:sp>
-        <p:nvSpPr>
-          <p:cNvPr id="15" name="Shape 13"/>
-          <p:cNvSpPr/>
-          <p:nvPr/>
-        </p:nvSpPr>
-        <p:spPr>
-          <a:xfrm>
-            <a:off x="640080" y="3913632"/>
-            <a:ext cx="7863840" cy="594360"/>
-          </a:xfrm>
-          <a:prstGeom prst="rect">
-            <a:avLst/>
-          </a:prstGeom>
-          <a:solidFill>
-            <a:srgbClr val="EBF5FB"/>
-          </a:solidFill>
-          <a:ln w="6350">
-            <a:solidFill>
-              <a:srgbClr val="1A5276"/>
-            </a:solidFill>
-            <a:prstDash val="solid"/>
-          </a:ln>
-        </p:spPr>
-      </p:sp>
-      <p:sp>
-        <p:nvSpPr>
-          <p:cNvPr id="16" name="Shape 14"/>
-          <p:cNvSpPr/>
-          <p:nvPr/>
-        </p:nvSpPr>
-        <p:spPr>
-          <a:xfrm>
-            <a:off x="640080" y="3913632"/>
-            <a:ext cx="54864" cy="594360"/>
-          </a:xfrm>
-          <a:prstGeom prst="rect">
-            <a:avLst/>
-          </a:prstGeom>
-          <a:solidFill>
-            <a:srgbClr val="1A5276"/>
-          </a:solidFill>
-          <a:ln/>
-        </p:spPr>
-      </p:sp>
-      <p:sp>
-        <p:nvSpPr>
-          <p:cNvPr id="17" name="Text 15"/>
-          <p:cNvSpPr/>
-          <p:nvPr/>
-        </p:nvSpPr>
-        <p:spPr>
-          <a:xfrm>
-            <a:off x="868680" y="3913632"/>
-            <a:ext cx="1828800" cy="594360"/>
-          </a:xfrm>
-          <a:prstGeom prst="rect">
-            <a:avLst/>
-          </a:prstGeom>
-          <a:noFill/>
-          <a:ln/>
-        </p:spPr>
-        <p:txBody>
-          <a:bodyPr wrap="square" rtlCol="0" anchor="ctr"/>
-          <a:lstStyle/>
-          <a:p>
-            <a:pPr indent="0" marL="0">
-              <a:buNone/>
-            </a:pPr>
-            <a:r>
-              <a:rPr lang="en-US" sz="1400" b="1" dirty="0">
-                <a:solidFill>
-                  <a:srgbClr val="1A5276"/>
-                </a:solidFill>
-                <a:latin typeface="Arial" pitchFamily="34" charset="0"/>
-                <a:ea typeface="Arial" pitchFamily="34" charset="-122"/>
-                <a:cs typeface="Arial" pitchFamily="34" charset="-120"/>
-              </a:rPr>
-              <a:t>Prijs</a:t>
-            </a:r>
-            <a:endParaRPr lang="en-US" sz="1400" dirty="0"/>
-          </a:p>
-        </p:txBody>
-      </p:sp>
-      <p:sp>
-        <p:nvSpPr>
-          <p:cNvPr id="18" name="Text 16"/>
-          <p:cNvSpPr/>
-          <p:nvPr/>
-        </p:nvSpPr>
-        <p:spPr>
-          <a:xfrm>
-            <a:off x="2743200" y="3913632"/>
-            <a:ext cx="5486400" cy="594360"/>
-          </a:xfrm>
-          <a:prstGeom prst="rect">
-            <a:avLst/>
-          </a:prstGeom>
-          <a:noFill/>
-          <a:ln/>
-        </p:spPr>
-        <p:txBody>
-          <a:bodyPr wrap="square" rtlCol="0" anchor="ctr"/>
-          <a:lstStyle/>
-          <a:p>
-            <a:pPr indent="0" marL="0">
-              <a:buNone/>
-            </a:pPr>
-            <a:r>
-              <a:rPr lang="en-US" sz="1600" b="1" dirty="0">
-                <a:solidFill>
-                  <a:srgbClr val="2D3748"/>
-                </a:solidFill>
-                <a:latin typeface="Consolas" pitchFamily="34" charset="0"/>
-                <a:ea typeface="Consolas" pitchFamily="34" charset="-122"/>
-                <a:cs typeface="Consolas" pitchFamily="34" charset="-120"/>
-              </a:rPr>
-              <a:t>p = 16 + 10 = €26</a:t>
-            </a:r>
-            <a:endParaRPr lang="en-US" sz="1600" dirty="0"/>
-          </a:p>
-        </p:txBody>
-      </p:sp>
+      <p:pic>
+        <p:nvPicPr>
+          <p:cNvPr id="3" name="Image 0" descr="preencoded.png">    </p:cNvPr>
+          <p:cNvPicPr>
+            <a:picLocks noChangeAspect="1"/>
+          </p:cNvPicPr>
+          <p:nvPr/>
+        </p:nvPicPr>
+        <p:blipFill>
+          <a:blip r:embed="rId1"/>
+          <a:stretch>
+            <a:fillRect/>
+          </a:stretch>
+        </p:blipFill>
+        <p:spPr>
+          <a:xfrm>
+            <a:off x="685800" y="822960"/>
+            <a:ext cx="7772400" cy="3886200"/>
+          </a:xfrm>
+          <a:prstGeom prst="rect">
+            <a:avLst/>
+          </a:prstGeom>
+        </p:spPr>
+      </p:pic>
     </p:spTree>
   </p:cSld>
   <p:clrMapOvr>
@@ -2633,6 +2389,960 @@
         </p:nvSpPr>
         <p:spPr>
           <a:xfrm>
+            <a:off x="457200" y="0"/>
+            <a:ext cx="8229600" cy="685800"/>
+          </a:xfrm>
+          <a:prstGeom prst="rect">
+            <a:avLst/>
+          </a:prstGeom>
+          <a:noFill/>
+          <a:ln/>
+        </p:spPr>
+        <p:txBody>
+          <a:bodyPr wrap="square" rtlCol="0" anchor="ctr"/>
+          <a:lstStyle/>
+          <a:p>
+            <a:pPr indent="0" marL="0">
+              <a:buNone/>
+            </a:pPr>
+            <a:r>
+              <a:rPr lang="en-US" sz="2400" b="1" dirty="0">
+                <a:solidFill>
+                  <a:srgbClr val="FFFFFF"/>
+                </a:solidFill>
+                <a:latin typeface="Arial" pitchFamily="34" charset="0"/>
+                <a:ea typeface="Arial" pitchFamily="34" charset="-122"/>
+                <a:cs typeface="Arial" pitchFamily="34" charset="-120"/>
+              </a:rPr>
+              <a:t>Lange termijn: winst verdwijnt</a:t>
+            </a:r>
+            <a:endParaRPr lang="en-US" sz="2400" dirty="0"/>
+          </a:p>
+        </p:txBody>
+      </p:sp>
+      <p:sp>
+        <p:nvSpPr>
+          <p:cNvPr id="3" name="Shape 1"/>
+          <p:cNvSpPr/>
+          <p:nvPr/>
+        </p:nvSpPr>
+        <p:spPr>
+          <a:xfrm>
+            <a:off x="1371600" y="1097280"/>
+            <a:ext cx="6400800" cy="548640"/>
+          </a:xfrm>
+          <a:prstGeom prst="rect">
+            <a:avLst>
+              <a:gd name="adj" fmla="val 8333"/>
+            </a:avLst>
+          </a:prstGeom>
+          <a:solidFill>
+            <a:srgbClr val="F9F6F1"/>
+          </a:solidFill>
+          <a:ln/>
+          <a:effectLst>
+            <a:outerShdw sx="100000" sy="100000" kx="0" ky="0" algn="bl" rotWithShape="0" blurRad="76200" dist="25400" dir="8100000">
+              <a:srgbClr val="000000">
+                <a:alpha val="10000"/>
+              </a:srgbClr>
+            </a:outerShdw>
+          </a:effectLst>
+        </p:spPr>
+      </p:sp>
+      <p:sp>
+        <p:nvSpPr>
+          <p:cNvPr id="4" name="Text 2"/>
+          <p:cNvSpPr/>
+          <p:nvPr/>
+        </p:nvSpPr>
+        <p:spPr>
+          <a:xfrm>
+            <a:off x="1645920" y="1097280"/>
+            <a:ext cx="5852160" cy="548640"/>
+          </a:xfrm>
+          <a:prstGeom prst="rect">
+            <a:avLst/>
+          </a:prstGeom>
+          <a:noFill/>
+          <a:ln/>
+        </p:spPr>
+        <p:txBody>
+          <a:bodyPr wrap="square" rtlCol="0" anchor="ctr"/>
+          <a:lstStyle/>
+          <a:p>
+            <a:pPr indent="0" marL="0">
+              <a:buNone/>
+            </a:pPr>
+            <a:r>
+              <a:rPr lang="en-US" sz="1700" dirty="0">
+                <a:solidFill>
+                  <a:srgbClr val="2D3748"/>
+                </a:solidFill>
+                <a:latin typeface="Arial" pitchFamily="34" charset="0"/>
+                <a:ea typeface="Arial" pitchFamily="34" charset="-122"/>
+                <a:cs typeface="Arial" pitchFamily="34" charset="-120"/>
+              </a:rPr>
+              <a:t>Bedrijven maken winst</a:t>
+            </a:r>
+            <a:endParaRPr lang="en-US" sz="1700" dirty="0"/>
+          </a:p>
+        </p:txBody>
+      </p:sp>
+      <p:sp>
+        <p:nvSpPr>
+          <p:cNvPr id="5" name="Text 3"/>
+          <p:cNvSpPr/>
+          <p:nvPr/>
+        </p:nvSpPr>
+        <p:spPr>
+          <a:xfrm>
+            <a:off x="1371600" y="1645920"/>
+            <a:ext cx="6400800" cy="228600"/>
+          </a:xfrm>
+          <a:prstGeom prst="rect">
+            <a:avLst/>
+          </a:prstGeom>
+          <a:noFill/>
+          <a:ln/>
+        </p:spPr>
+        <p:txBody>
+          <a:bodyPr wrap="square" rtlCol="0" anchor="ctr"/>
+          <a:lstStyle/>
+          <a:p>
+            <a:pPr algn="ctr" indent="0" marL="0">
+              <a:buNone/>
+            </a:pPr>
+            <a:r>
+              <a:rPr lang="en-US" sz="1600" b="1" dirty="0">
+                <a:solidFill>
+                  <a:srgbClr val="1A5276"/>
+                </a:solidFill>
+                <a:latin typeface="Arial" pitchFamily="34" charset="0"/>
+                <a:ea typeface="Arial" pitchFamily="34" charset="-122"/>
+                <a:cs typeface="Arial" pitchFamily="34" charset="-120"/>
+              </a:rPr>
+              <a:t>↓</a:t>
+            </a:r>
+            <a:endParaRPr lang="en-US" sz="1600" dirty="0"/>
+          </a:p>
+        </p:txBody>
+      </p:sp>
+      <p:sp>
+        <p:nvSpPr>
+          <p:cNvPr id="6" name="Shape 4"/>
+          <p:cNvSpPr/>
+          <p:nvPr/>
+        </p:nvSpPr>
+        <p:spPr>
+          <a:xfrm>
+            <a:off x="1371600" y="1874520"/>
+            <a:ext cx="6400800" cy="548640"/>
+          </a:xfrm>
+          <a:prstGeom prst="rect">
+            <a:avLst>
+              <a:gd name="adj" fmla="val 8333"/>
+            </a:avLst>
+          </a:prstGeom>
+          <a:solidFill>
+            <a:srgbClr val="F9F6F1"/>
+          </a:solidFill>
+          <a:ln/>
+          <a:effectLst>
+            <a:outerShdw sx="100000" sy="100000" kx="0" ky="0" algn="bl" rotWithShape="0" blurRad="76200" dist="25400" dir="8100000">
+              <a:srgbClr val="000000">
+                <a:alpha val="10000"/>
+              </a:srgbClr>
+            </a:outerShdw>
+          </a:effectLst>
+        </p:spPr>
+      </p:sp>
+      <p:sp>
+        <p:nvSpPr>
+          <p:cNvPr id="7" name="Text 5"/>
+          <p:cNvSpPr/>
+          <p:nvPr/>
+        </p:nvSpPr>
+        <p:spPr>
+          <a:xfrm>
+            <a:off x="1645920" y="1874520"/>
+            <a:ext cx="5852160" cy="548640"/>
+          </a:xfrm>
+          <a:prstGeom prst="rect">
+            <a:avLst/>
+          </a:prstGeom>
+          <a:noFill/>
+          <a:ln/>
+        </p:spPr>
+        <p:txBody>
+          <a:bodyPr wrap="square" rtlCol="0" anchor="ctr"/>
+          <a:lstStyle/>
+          <a:p>
+            <a:pPr indent="0" marL="0">
+              <a:buNone/>
+            </a:pPr>
+            <a:r>
+              <a:rPr lang="en-US" sz="1700" dirty="0">
+                <a:solidFill>
+                  <a:srgbClr val="2D3748"/>
+                </a:solidFill>
+                <a:latin typeface="Arial" pitchFamily="34" charset="0"/>
+                <a:ea typeface="Arial" pitchFamily="34" charset="-122"/>
+                <a:cs typeface="Arial" pitchFamily="34" charset="-120"/>
+              </a:rPr>
+              <a:t>Nieuwe aanbieders treden toe</a:t>
+            </a:r>
+            <a:endParaRPr lang="en-US" sz="1700" dirty="0"/>
+          </a:p>
+        </p:txBody>
+      </p:sp>
+      <p:sp>
+        <p:nvSpPr>
+          <p:cNvPr id="8" name="Text 6"/>
+          <p:cNvSpPr/>
+          <p:nvPr/>
+        </p:nvSpPr>
+        <p:spPr>
+          <a:xfrm>
+            <a:off x="1371600" y="2423160"/>
+            <a:ext cx="6400800" cy="228600"/>
+          </a:xfrm>
+          <a:prstGeom prst="rect">
+            <a:avLst/>
+          </a:prstGeom>
+          <a:noFill/>
+          <a:ln/>
+        </p:spPr>
+        <p:txBody>
+          <a:bodyPr wrap="square" rtlCol="0" anchor="ctr"/>
+          <a:lstStyle/>
+          <a:p>
+            <a:pPr algn="ctr" indent="0" marL="0">
+              <a:buNone/>
+            </a:pPr>
+            <a:r>
+              <a:rPr lang="en-US" sz="1600" b="1" dirty="0">
+                <a:solidFill>
+                  <a:srgbClr val="1A5276"/>
+                </a:solidFill>
+                <a:latin typeface="Arial" pitchFamily="34" charset="0"/>
+                <a:ea typeface="Arial" pitchFamily="34" charset="-122"/>
+                <a:cs typeface="Arial" pitchFamily="34" charset="-120"/>
+              </a:rPr>
+              <a:t>↓</a:t>
+            </a:r>
+            <a:endParaRPr lang="en-US" sz="1600" dirty="0"/>
+          </a:p>
+        </p:txBody>
+      </p:sp>
+      <p:sp>
+        <p:nvSpPr>
+          <p:cNvPr id="9" name="Shape 7"/>
+          <p:cNvSpPr/>
+          <p:nvPr/>
+        </p:nvSpPr>
+        <p:spPr>
+          <a:xfrm>
+            <a:off x="1371600" y="2651760"/>
+            <a:ext cx="6400800" cy="548640"/>
+          </a:xfrm>
+          <a:prstGeom prst="rect">
+            <a:avLst>
+              <a:gd name="adj" fmla="val 8333"/>
+            </a:avLst>
+          </a:prstGeom>
+          <a:solidFill>
+            <a:srgbClr val="EBF5FB"/>
+          </a:solidFill>
+          <a:ln/>
+          <a:effectLst>
+            <a:outerShdw sx="100000" sy="100000" kx="0" ky="0" algn="bl" rotWithShape="0" blurRad="76200" dist="25400" dir="8100000">
+              <a:srgbClr val="000000">
+                <a:alpha val="10000"/>
+              </a:srgbClr>
+            </a:outerShdw>
+          </a:effectLst>
+        </p:spPr>
+      </p:sp>
+      <p:sp>
+        <p:nvSpPr>
+          <p:cNvPr id="10" name="Text 8"/>
+          <p:cNvSpPr/>
+          <p:nvPr/>
+        </p:nvSpPr>
+        <p:spPr>
+          <a:xfrm>
+            <a:off x="1645920" y="2651760"/>
+            <a:ext cx="5852160" cy="548640"/>
+          </a:xfrm>
+          <a:prstGeom prst="rect">
+            <a:avLst/>
+          </a:prstGeom>
+          <a:noFill/>
+          <a:ln/>
+        </p:spPr>
+        <p:txBody>
+          <a:bodyPr wrap="square" rtlCol="0" anchor="ctr"/>
+          <a:lstStyle/>
+          <a:p>
+            <a:pPr indent="0" marL="0">
+              <a:buNone/>
+            </a:pPr>
+            <a:r>
+              <a:rPr lang="en-US" sz="1700" dirty="0">
+                <a:solidFill>
+                  <a:srgbClr val="2D3748"/>
+                </a:solidFill>
+                <a:latin typeface="Arial" pitchFamily="34" charset="0"/>
+                <a:ea typeface="Arial" pitchFamily="34" charset="-122"/>
+                <a:cs typeface="Arial" pitchFamily="34" charset="-120"/>
+              </a:rPr>
+              <a:t>Aanbod stijgt → prijs daalt</a:t>
+            </a:r>
+            <a:endParaRPr lang="en-US" sz="1700" dirty="0"/>
+          </a:p>
+        </p:txBody>
+      </p:sp>
+      <p:sp>
+        <p:nvSpPr>
+          <p:cNvPr id="11" name="Text 9"/>
+          <p:cNvSpPr/>
+          <p:nvPr/>
+        </p:nvSpPr>
+        <p:spPr>
+          <a:xfrm>
+            <a:off x="1371600" y="3200400"/>
+            <a:ext cx="6400800" cy="228600"/>
+          </a:xfrm>
+          <a:prstGeom prst="rect">
+            <a:avLst/>
+          </a:prstGeom>
+          <a:noFill/>
+          <a:ln/>
+        </p:spPr>
+        <p:txBody>
+          <a:bodyPr wrap="square" rtlCol="0" anchor="ctr"/>
+          <a:lstStyle/>
+          <a:p>
+            <a:pPr algn="ctr" indent="0" marL="0">
+              <a:buNone/>
+            </a:pPr>
+            <a:r>
+              <a:rPr lang="en-US" sz="1600" b="1" dirty="0">
+                <a:solidFill>
+                  <a:srgbClr val="1A5276"/>
+                </a:solidFill>
+                <a:latin typeface="Arial" pitchFamily="34" charset="0"/>
+                <a:ea typeface="Arial" pitchFamily="34" charset="-122"/>
+                <a:cs typeface="Arial" pitchFamily="34" charset="-120"/>
+              </a:rPr>
+              <a:t>↓</a:t>
+            </a:r>
+            <a:endParaRPr lang="en-US" sz="1600" dirty="0"/>
+          </a:p>
+        </p:txBody>
+      </p:sp>
+      <p:sp>
+        <p:nvSpPr>
+          <p:cNvPr id="12" name="Shape 10"/>
+          <p:cNvSpPr/>
+          <p:nvPr/>
+        </p:nvSpPr>
+        <p:spPr>
+          <a:xfrm>
+            <a:off x="1371600" y="3429000"/>
+            <a:ext cx="6400800" cy="548640"/>
+          </a:xfrm>
+          <a:prstGeom prst="rect">
+            <a:avLst>
+              <a:gd name="adj" fmla="val 8333"/>
+            </a:avLst>
+          </a:prstGeom>
+          <a:solidFill>
+            <a:srgbClr val="1A5276"/>
+          </a:solidFill>
+          <a:ln/>
+          <a:effectLst>
+            <a:outerShdw sx="100000" sy="100000" kx="0" ky="0" algn="bl" rotWithShape="0" blurRad="76200" dist="25400" dir="8100000">
+              <a:srgbClr val="000000">
+                <a:alpha val="10000"/>
+              </a:srgbClr>
+            </a:outerShdw>
+          </a:effectLst>
+        </p:spPr>
+      </p:sp>
+      <p:sp>
+        <p:nvSpPr>
+          <p:cNvPr id="13" name="Text 11"/>
+          <p:cNvSpPr/>
+          <p:nvPr/>
+        </p:nvSpPr>
+        <p:spPr>
+          <a:xfrm>
+            <a:off x="1645920" y="3429000"/>
+            <a:ext cx="5852160" cy="548640"/>
+          </a:xfrm>
+          <a:prstGeom prst="rect">
+            <a:avLst/>
+          </a:prstGeom>
+          <a:noFill/>
+          <a:ln/>
+        </p:spPr>
+        <p:txBody>
+          <a:bodyPr wrap="square" rtlCol="0" anchor="ctr"/>
+          <a:lstStyle/>
+          <a:p>
+            <a:pPr indent="0" marL="0">
+              <a:buNone/>
+            </a:pPr>
+            <a:r>
+              <a:rPr lang="en-US" sz="1700" b="1" dirty="0">
+                <a:solidFill>
+                  <a:srgbClr val="FFFFFF"/>
+                </a:solidFill>
+                <a:latin typeface="Arial" pitchFamily="34" charset="0"/>
+                <a:ea typeface="Arial" pitchFamily="34" charset="-122"/>
+                <a:cs typeface="Arial" pitchFamily="34" charset="-120"/>
+              </a:rPr>
+              <a:t>Winst → 0  |  p = GTK(min)</a:t>
+            </a:r>
+            <a:endParaRPr lang="en-US" sz="1700" dirty="0"/>
+          </a:p>
+        </p:txBody>
+      </p:sp>
+      <p:sp>
+        <p:nvSpPr>
+          <p:cNvPr id="14" name="Text 12"/>
+          <p:cNvSpPr/>
+          <p:nvPr/>
+        </p:nvSpPr>
+        <p:spPr>
+          <a:xfrm>
+            <a:off x="640080" y="4114800"/>
+            <a:ext cx="7863840" cy="365760"/>
+          </a:xfrm>
+          <a:prstGeom prst="rect">
+            <a:avLst/>
+          </a:prstGeom>
+          <a:noFill/>
+          <a:ln/>
+        </p:spPr>
+        <p:txBody>
+          <a:bodyPr wrap="square" rtlCol="0" anchor="ctr"/>
+          <a:lstStyle/>
+          <a:p>
+            <a:pPr indent="0" marL="0">
+              <a:buNone/>
+            </a:pPr>
+            <a:r>
+              <a:rPr lang="en-US" sz="1400" b="1" i="1" dirty="0">
+                <a:solidFill>
+                  <a:srgbClr val="2D3748"/>
+                </a:solidFill>
+                <a:latin typeface="Arial" pitchFamily="34" charset="0"/>
+                <a:ea typeface="Arial" pitchFamily="34" charset="-122"/>
+                <a:cs typeface="Arial" pitchFamily="34" charset="-120"/>
+              </a:rPr>
+              <a:t>Op lange termijn: economische winst = 0</a:t>
+            </a:r>
+            <a:endParaRPr lang="en-US" sz="1400" dirty="0"/>
+          </a:p>
+        </p:txBody>
+      </p:sp>
+    </p:spTree>
+  </p:cSld>
+  <p:clrMapOvr>
+    <a:masterClrMapping/>
+  </p:clrMapOvr>
+</p:sld>
+</file>
+
+<file path=ppt/slides/slide12.xml><?xml version="1.0" encoding="utf-8"?>
+<p:sld xmlns:a="http://schemas.openxmlformats.org/drawingml/2006/main" xmlns:r="http://schemas.openxmlformats.org/officeDocument/2006/relationships" xmlns:p="http://schemas.openxmlformats.org/presentationml/2006/main">
+  <p:cSld name="Slide 12">
+    <p:spTree>
+      <p:nvGrpSpPr>
+        <p:cNvPr id="1" name=""/>
+        <p:cNvGrpSpPr/>
+        <p:nvPr/>
+      </p:nvGrpSpPr>
+      <p:grpSpPr>
+        <a:xfrm>
+          <a:off x="0" y="0"/>
+          <a:ext cx="0" cy="0"/>
+          <a:chOff x="0" y="0"/>
+          <a:chExt cx="0" cy="0"/>
+        </a:xfrm>
+      </p:grpSpPr>
+      <p:sp>
+        <p:nvSpPr>
+          <p:cNvPr id="2" name="Text 0"/>
+          <p:cNvSpPr/>
+          <p:nvPr/>
+        </p:nvSpPr>
+        <p:spPr>
+          <a:xfrm>
+            <a:off x="457200" y="0"/>
+            <a:ext cx="8229600" cy="685800"/>
+          </a:xfrm>
+          <a:prstGeom prst="rect">
+            <a:avLst/>
+          </a:prstGeom>
+          <a:noFill/>
+          <a:ln/>
+        </p:spPr>
+        <p:txBody>
+          <a:bodyPr wrap="square" rtlCol="0" anchor="ctr"/>
+          <a:lstStyle/>
+          <a:p>
+            <a:pPr indent="0" marL="0">
+              <a:buNone/>
+            </a:pPr>
+            <a:r>
+              <a:rPr lang="en-US" sz="2400" b="1" dirty="0">
+                <a:solidFill>
+                  <a:srgbClr val="FFFFFF"/>
+                </a:solidFill>
+                <a:latin typeface="Arial" pitchFamily="34" charset="0"/>
+                <a:ea typeface="Arial" pitchFamily="34" charset="-122"/>
+                <a:cs typeface="Arial" pitchFamily="34" charset="-120"/>
+              </a:rPr>
+              <a:t>Lange termijn: MK = GTK</a:t>
+            </a:r>
+            <a:endParaRPr lang="en-US" sz="2400" dirty="0"/>
+          </a:p>
+        </p:txBody>
+      </p:sp>
+      <p:sp>
+        <p:nvSpPr>
+          <p:cNvPr id="3" name="Shape 1"/>
+          <p:cNvSpPr/>
+          <p:nvPr/>
+        </p:nvSpPr>
+        <p:spPr>
+          <a:xfrm>
+            <a:off x="914400" y="960120"/>
+            <a:ext cx="7315200" cy="2697480"/>
+          </a:xfrm>
+          <a:prstGeom prst="rect">
+            <a:avLst/>
+          </a:prstGeom>
+          <a:solidFill>
+            <a:srgbClr val="F7F8FA"/>
+          </a:solidFill>
+          <a:ln w="6350">
+            <a:solidFill>
+              <a:srgbClr val="CBD5E0"/>
+            </a:solidFill>
+            <a:prstDash val="solid"/>
+          </a:ln>
+        </p:spPr>
+      </p:sp>
+      <p:sp>
+        <p:nvSpPr>
+          <p:cNvPr id="4" name="Shape 2"/>
+          <p:cNvSpPr/>
+          <p:nvPr/>
+        </p:nvSpPr>
+        <p:spPr>
+          <a:xfrm>
+            <a:off x="914400" y="960120"/>
+            <a:ext cx="54864" cy="2697480"/>
+          </a:xfrm>
+          <a:prstGeom prst="rect">
+            <a:avLst/>
+          </a:prstGeom>
+          <a:solidFill>
+            <a:srgbClr val="1A5276"/>
+          </a:solidFill>
+          <a:ln/>
+        </p:spPr>
+      </p:sp>
+      <p:sp>
+        <p:nvSpPr>
+          <p:cNvPr id="5" name="Text 3"/>
+          <p:cNvSpPr/>
+          <p:nvPr/>
+        </p:nvSpPr>
+        <p:spPr>
+          <a:xfrm>
+            <a:off x="1143000" y="1051560"/>
+            <a:ext cx="6858000" cy="502920"/>
+          </a:xfrm>
+          <a:prstGeom prst="rect">
+            <a:avLst/>
+          </a:prstGeom>
+          <a:noFill/>
+          <a:ln/>
+        </p:spPr>
+        <p:txBody>
+          <a:bodyPr wrap="square" rtlCol="0" anchor="ctr"/>
+          <a:lstStyle/>
+          <a:p>
+            <a:pPr indent="0" marL="0">
+              <a:buNone/>
+            </a:pPr>
+            <a:r>
+              <a:rPr lang="en-US" sz="1400" b="1" dirty="0">
+                <a:solidFill>
+                  <a:srgbClr val="718096"/>
+                </a:solidFill>
+                <a:latin typeface="Arial" pitchFamily="34" charset="0"/>
+                <a:ea typeface="Arial" pitchFamily="34" charset="-122"/>
+                <a:cs typeface="Arial" pitchFamily="34" charset="-120"/>
+              </a:rPr>
+              <a:t>Stel:  </a:t>
+            </a:r>
+            <a:pPr indent="0" marL="0">
+              <a:buNone/>
+            </a:pPr>
+            <a:r>
+              <a:rPr lang="en-US" sz="1600" dirty="0">
+                <a:solidFill>
+                  <a:srgbClr val="2D3748"/>
+                </a:solidFill>
+                <a:latin typeface="Consolas" pitchFamily="34" charset="0"/>
+                <a:ea typeface="Consolas" pitchFamily="34" charset="-122"/>
+                <a:cs typeface="Consolas" pitchFamily="34" charset="-120"/>
+              </a:rPr>
+              <a:t>MK = GTK  (geen winst, geen verlies)</a:t>
+            </a:r>
+            <a:endParaRPr lang="en-US" sz="1400" dirty="0"/>
+          </a:p>
+        </p:txBody>
+      </p:sp>
+      <p:sp>
+        <p:nvSpPr>
+          <p:cNvPr id="6" name="Text 4"/>
+          <p:cNvSpPr/>
+          <p:nvPr/>
+        </p:nvSpPr>
+        <p:spPr>
+          <a:xfrm>
+            <a:off x="1143000" y="1554480"/>
+            <a:ext cx="6858000" cy="502920"/>
+          </a:xfrm>
+          <a:prstGeom prst="rect">
+            <a:avLst/>
+          </a:prstGeom>
+          <a:noFill/>
+          <a:ln/>
+        </p:spPr>
+        <p:txBody>
+          <a:bodyPr wrap="square" rtlCol="0" anchor="ctr"/>
+          <a:lstStyle/>
+          <a:p>
+            <a:pPr indent="0" marL="0">
+              <a:buNone/>
+            </a:pPr>
+            <a:r>
+              <a:rPr lang="en-US" sz="1400" b="1" dirty="0">
+                <a:solidFill>
+                  <a:srgbClr val="718096"/>
+                </a:solidFill>
+                <a:latin typeface="Arial" pitchFamily="34" charset="0"/>
+                <a:ea typeface="Arial" pitchFamily="34" charset="-122"/>
+                <a:cs typeface="Arial" pitchFamily="34" charset="-120"/>
+              </a:rPr>
+              <a:t>Invullen:  </a:t>
+            </a:r>
+            <a:pPr indent="0" marL="0">
+              <a:buNone/>
+            </a:pPr>
+            <a:r>
+              <a:rPr lang="en-US" sz="1600" dirty="0">
+                <a:solidFill>
+                  <a:srgbClr val="2D3748"/>
+                </a:solidFill>
+                <a:latin typeface="Consolas" pitchFamily="34" charset="0"/>
+                <a:ea typeface="Consolas" pitchFamily="34" charset="-122"/>
+                <a:cs typeface="Consolas" pitchFamily="34" charset="-120"/>
+              </a:rPr>
+              <a:t>q + 10 = 0,5q + 10 + 128/q</a:t>
+            </a:r>
+            <a:endParaRPr lang="en-US" sz="1400" dirty="0"/>
+          </a:p>
+        </p:txBody>
+      </p:sp>
+      <p:sp>
+        <p:nvSpPr>
+          <p:cNvPr id="7" name="Text 5"/>
+          <p:cNvSpPr/>
+          <p:nvPr/>
+        </p:nvSpPr>
+        <p:spPr>
+          <a:xfrm>
+            <a:off x="1143000" y="2057400"/>
+            <a:ext cx="6858000" cy="502920"/>
+          </a:xfrm>
+          <a:prstGeom prst="rect">
+            <a:avLst/>
+          </a:prstGeom>
+          <a:noFill/>
+          <a:ln/>
+        </p:spPr>
+        <p:txBody>
+          <a:bodyPr wrap="square" rtlCol="0" anchor="ctr"/>
+          <a:lstStyle/>
+          <a:p>
+            <a:pPr indent="0" marL="0">
+              <a:buNone/>
+            </a:pPr>
+            <a:r>
+              <a:rPr lang="en-US" sz="1400" b="1" dirty="0">
+                <a:solidFill>
+                  <a:srgbClr val="718096"/>
+                </a:solidFill>
+                <a:latin typeface="Arial" pitchFamily="34" charset="0"/>
+                <a:ea typeface="Arial" pitchFamily="34" charset="-122"/>
+                <a:cs typeface="Arial" pitchFamily="34" charset="-120"/>
+              </a:rPr>
+              <a:t>Vereenvoudig:  </a:t>
+            </a:r>
+            <a:pPr indent="0" marL="0">
+              <a:buNone/>
+            </a:pPr>
+            <a:r>
+              <a:rPr lang="en-US" sz="1600" dirty="0">
+                <a:solidFill>
+                  <a:srgbClr val="2D3748"/>
+                </a:solidFill>
+                <a:latin typeface="Consolas" pitchFamily="34" charset="0"/>
+                <a:ea typeface="Consolas" pitchFamily="34" charset="-122"/>
+                <a:cs typeface="Consolas" pitchFamily="34" charset="-120"/>
+              </a:rPr>
+              <a:t>0,5q = 128/q  →  0,5q² = 128</a:t>
+            </a:r>
+            <a:endParaRPr lang="en-US" sz="1400" dirty="0"/>
+          </a:p>
+        </p:txBody>
+      </p:sp>
+      <p:sp>
+        <p:nvSpPr>
+          <p:cNvPr id="8" name="Text 6"/>
+          <p:cNvSpPr/>
+          <p:nvPr/>
+        </p:nvSpPr>
+        <p:spPr>
+          <a:xfrm>
+            <a:off x="1143000" y="2560320"/>
+            <a:ext cx="6858000" cy="502920"/>
+          </a:xfrm>
+          <a:prstGeom prst="rect">
+            <a:avLst/>
+          </a:prstGeom>
+          <a:noFill/>
+          <a:ln/>
+        </p:spPr>
+        <p:txBody>
+          <a:bodyPr wrap="square" rtlCol="0" anchor="ctr"/>
+          <a:lstStyle/>
+          <a:p>
+            <a:pPr indent="0" marL="0">
+              <a:buNone/>
+            </a:pPr>
+            <a:r>
+              <a:rPr lang="en-US" sz="1400" b="1" dirty="0">
+                <a:solidFill>
+                  <a:srgbClr val="718096"/>
+                </a:solidFill>
+                <a:latin typeface="Arial" pitchFamily="34" charset="0"/>
+                <a:ea typeface="Arial" pitchFamily="34" charset="-122"/>
+                <a:cs typeface="Arial" pitchFamily="34" charset="-120"/>
+              </a:rPr>
+              <a:t>Oplossen:  </a:t>
+            </a:r>
+            <a:pPr indent="0" marL="0">
+              <a:buNone/>
+            </a:pPr>
+            <a:r>
+              <a:rPr lang="en-US" sz="1600" dirty="0">
+                <a:solidFill>
+                  <a:srgbClr val="2D3748"/>
+                </a:solidFill>
+                <a:latin typeface="Consolas" pitchFamily="34" charset="0"/>
+                <a:ea typeface="Consolas" pitchFamily="34" charset="-122"/>
+                <a:cs typeface="Consolas" pitchFamily="34" charset="-120"/>
+              </a:rPr>
+              <a:t>q² = 256  →  q = 16</a:t>
+            </a:r>
+            <a:endParaRPr lang="en-US" sz="1400" dirty="0"/>
+          </a:p>
+        </p:txBody>
+      </p:sp>
+      <p:sp>
+        <p:nvSpPr>
+          <p:cNvPr id="9" name="Text 7"/>
+          <p:cNvSpPr/>
+          <p:nvPr/>
+        </p:nvSpPr>
+        <p:spPr>
+          <a:xfrm>
+            <a:off x="1143000" y="3063240"/>
+            <a:ext cx="6858000" cy="502920"/>
+          </a:xfrm>
+          <a:prstGeom prst="rect">
+            <a:avLst/>
+          </a:prstGeom>
+          <a:noFill/>
+          <a:ln/>
+        </p:spPr>
+        <p:txBody>
+          <a:bodyPr wrap="square" rtlCol="0" anchor="ctr"/>
+          <a:lstStyle/>
+          <a:p>
+            <a:pPr indent="0" marL="0">
+              <a:buNone/>
+            </a:pPr>
+            <a:r>
+              <a:rPr lang="en-US" sz="1400" b="1" dirty="0">
+                <a:solidFill>
+                  <a:srgbClr val="718096"/>
+                </a:solidFill>
+                <a:latin typeface="Arial" pitchFamily="34" charset="0"/>
+                <a:ea typeface="Arial" pitchFamily="34" charset="-122"/>
+                <a:cs typeface="Arial" pitchFamily="34" charset="-120"/>
+              </a:rPr>
+              <a:t>Prijs:  </a:t>
+            </a:r>
+            <a:pPr indent="0" marL="0">
+              <a:buNone/>
+            </a:pPr>
+            <a:r>
+              <a:rPr lang="en-US" sz="1600" dirty="0">
+                <a:solidFill>
+                  <a:srgbClr val="2D3748"/>
+                </a:solidFill>
+                <a:latin typeface="Consolas" pitchFamily="34" charset="0"/>
+                <a:ea typeface="Consolas" pitchFamily="34" charset="-122"/>
+                <a:cs typeface="Consolas" pitchFamily="34" charset="-120"/>
+              </a:rPr>
+              <a:t>p = 16 + 10 = €26</a:t>
+            </a:r>
+            <a:endParaRPr lang="en-US" sz="1400" dirty="0"/>
+          </a:p>
+        </p:txBody>
+      </p:sp>
+    </p:spTree>
+  </p:cSld>
+  <p:clrMapOvr>
+    <a:masterClrMapping/>
+  </p:clrMapOvr>
+</p:sld>
+</file>
+
+<file path=ppt/slides/slide13.xml><?xml version="1.0" encoding="utf-8"?>
+<p:sld xmlns:a="http://schemas.openxmlformats.org/drawingml/2006/main" xmlns:r="http://schemas.openxmlformats.org/officeDocument/2006/relationships" xmlns:p="http://schemas.openxmlformats.org/presentationml/2006/main">
+  <p:cSld name="Slide 13">
+    <p:spTree>
+      <p:nvGrpSpPr>
+        <p:cNvPr id="1" name=""/>
+        <p:cNvGrpSpPr/>
+        <p:nvPr/>
+      </p:nvGrpSpPr>
+      <p:grpSpPr>
+        <a:xfrm>
+          <a:off x="0" y="0"/>
+          <a:ext cx="0" cy="0"/>
+          <a:chOff x="0" y="0"/>
+          <a:chExt cx="0" cy="0"/>
+        </a:xfrm>
+      </p:grpSpPr>
+      <p:sp>
+        <p:nvSpPr>
+          <p:cNvPr id="2" name="Text 0"/>
+          <p:cNvSpPr/>
+          <p:nvPr/>
+        </p:nvSpPr>
+        <p:spPr>
+          <a:xfrm>
+            <a:off x="457200" y="0"/>
+            <a:ext cx="8229600" cy="685800"/>
+          </a:xfrm>
+          <a:prstGeom prst="rect">
+            <a:avLst/>
+          </a:prstGeom>
+          <a:noFill/>
+          <a:ln/>
+        </p:spPr>
+        <p:txBody>
+          <a:bodyPr wrap="square" rtlCol="0" anchor="ctr"/>
+          <a:lstStyle/>
+          <a:p>
+            <a:pPr indent="0" marL="0">
+              <a:buNone/>
+            </a:pPr>
+            <a:r>
+              <a:rPr lang="en-US" sz="2400" b="1" dirty="0">
+                <a:solidFill>
+                  <a:srgbClr val="FFFFFF"/>
+                </a:solidFill>
+                <a:latin typeface="Arial" pitchFamily="34" charset="0"/>
+                <a:ea typeface="Arial" pitchFamily="34" charset="-122"/>
+                <a:cs typeface="Arial" pitchFamily="34" charset="-120"/>
+              </a:rPr>
+              <a:t>Lange termijn: winst = 0</a:t>
+            </a:r>
+            <a:endParaRPr lang="en-US" sz="2400" dirty="0"/>
+          </a:p>
+        </p:txBody>
+      </p:sp>
+      <p:pic>
+        <p:nvPicPr>
+          <p:cNvPr id="3" name="Image 0" descr="preencoded.png">    </p:cNvPr>
+          <p:cNvPicPr>
+            <a:picLocks noChangeAspect="1"/>
+          </p:cNvPicPr>
+          <p:nvPr/>
+        </p:nvPicPr>
+        <p:blipFill>
+          <a:blip r:embed="rId1"/>
+          <a:stretch>
+            <a:fillRect/>
+          </a:stretch>
+        </p:blipFill>
+        <p:spPr>
+          <a:xfrm>
+            <a:off x="685800" y="822960"/>
+            <a:ext cx="7772400" cy="3886200"/>
+          </a:xfrm>
+          <a:prstGeom prst="rect">
+            <a:avLst/>
+          </a:prstGeom>
+        </p:spPr>
+      </p:pic>
+    </p:spTree>
+  </p:cSld>
+  <p:clrMapOvr>
+    <a:masterClrMapping/>
+  </p:clrMapOvr>
+</p:sld>
+</file>
+
+<file path=ppt/slides/slide14.xml><?xml version="1.0" encoding="utf-8"?>
+<p:sld xmlns:a="http://schemas.openxmlformats.org/drawingml/2006/main" xmlns:r="http://schemas.openxmlformats.org/officeDocument/2006/relationships" xmlns:p="http://schemas.openxmlformats.org/presentationml/2006/main">
+  <p:cSld name="Slide 14">
+    <p:spTree>
+      <p:nvGrpSpPr>
+        <p:cNvPr id="1" name=""/>
+        <p:cNvGrpSpPr/>
+        <p:nvPr/>
+      </p:nvGrpSpPr>
+      <p:grpSpPr>
+        <a:xfrm>
+          <a:off x="0" y="0"/>
+          <a:ext cx="0" cy="0"/>
+          <a:chOff x="0" y="0"/>
+          <a:chExt cx="0" cy="0"/>
+        </a:xfrm>
+      </p:grpSpPr>
+      <p:sp>
+        <p:nvSpPr>
+          <p:cNvPr id="2" name="Text 0"/>
+          <p:cNvSpPr/>
+          <p:nvPr/>
+        </p:nvSpPr>
+        <p:spPr>
+          <a:xfrm>
             <a:off x="640080" y="457200"/>
             <a:ext cx="7863840" cy="640080"/>
           </a:xfrm>
@@ -2932,7 +3642,7 @@
           <a:p>
             <a:pPr marL="342900" indent="-342900">
               <a:lnSpc>
-                <a:spcPct val="145000"/>
+                <a:spcPct val="140000"/>
               </a:lnSpc>
               <a:spcAft>
                 <a:spcPts val="600"/>
@@ -2941,7 +3651,7 @@
               <a:buChar char="•"/>
             </a:pPr>
             <a:r>
-              <a:rPr lang="en-US" sz="1600" dirty="0">
+              <a:rPr lang="en-US" sz="1500" dirty="0">
                 <a:solidFill>
                   <a:srgbClr val="2D3748"/>
                 </a:solidFill>
@@ -2951,12 +3661,12 @@
               </a:rPr>
               <a:t>De kenmerken van volkomen concurrentie herkennen</a:t>
             </a:r>
-            <a:endParaRPr lang="en-US" sz="1600" dirty="0"/>
+            <a:endParaRPr lang="en-US" sz="1500" dirty="0"/>
           </a:p>
           <a:p>
             <a:pPr marL="342900" indent="-342900">
               <a:lnSpc>
-                <a:spcPct val="145000"/>
+                <a:spcPct val="140000"/>
               </a:lnSpc>
               <a:spcAft>
                 <a:spcPts val="600"/>
@@ -2965,7 +3675,7 @@
               <a:buChar char="•"/>
             </a:pPr>
             <a:r>
-              <a:rPr lang="en-US" sz="1600" dirty="0">
+              <a:rPr lang="en-US" sz="1500" dirty="0">
                 <a:solidFill>
                   <a:srgbClr val="2D3748"/>
                 </a:solidFill>
@@ -2975,12 +3685,12 @@
               </a:rPr>
               <a:t>Van kostenfunctie naar (collectieve) aanbodfunctie afleiden</a:t>
             </a:r>
-            <a:endParaRPr lang="en-US" sz="1600" dirty="0"/>
+            <a:endParaRPr lang="en-US" sz="1500" dirty="0"/>
           </a:p>
           <a:p>
             <a:pPr marL="342900" indent="-342900">
               <a:lnSpc>
-                <a:spcPct val="145000"/>
+                <a:spcPct val="140000"/>
               </a:lnSpc>
               <a:spcAft>
                 <a:spcPts val="600"/>
@@ -2989,7 +3699,7 @@
               <a:buChar char="•"/>
             </a:pPr>
             <a:r>
-              <a:rPr lang="en-US" sz="1600" dirty="0">
+              <a:rPr lang="en-US" sz="1500" dirty="0">
                 <a:solidFill>
                   <a:srgbClr val="2D3748"/>
                 </a:solidFill>
@@ -2999,12 +3709,12 @@
               </a:rPr>
               <a:t>Het marktevenwicht berekenen (Qv = Qa)</a:t>
             </a:r>
-            <a:endParaRPr lang="en-US" sz="1600" dirty="0"/>
+            <a:endParaRPr lang="en-US" sz="1500" dirty="0"/>
           </a:p>
           <a:p>
             <a:pPr marL="342900" indent="-342900">
               <a:lnSpc>
-                <a:spcPct val="145000"/>
+                <a:spcPct val="140000"/>
               </a:lnSpc>
               <a:spcAft>
                 <a:spcPts val="600"/>
@@ -3013,7 +3723,7 @@
               <a:buChar char="•"/>
             </a:pPr>
             <a:r>
-              <a:rPr lang="en-US" sz="1600" dirty="0">
+              <a:rPr lang="en-US" sz="1500" dirty="0">
                 <a:solidFill>
                   <a:srgbClr val="2D3748"/>
                 </a:solidFill>
@@ -3023,12 +3733,12 @@
               </a:rPr>
               <a:t>De winst van een individuele aanbieder berekenen</a:t>
             </a:r>
-            <a:endParaRPr lang="en-US" sz="1600" dirty="0"/>
+            <a:endParaRPr lang="en-US" sz="1500" dirty="0"/>
           </a:p>
           <a:p>
             <a:pPr marL="342900" indent="-342900">
               <a:lnSpc>
-                <a:spcPct val="145000"/>
+                <a:spcPct val="140000"/>
               </a:lnSpc>
               <a:spcAft>
                 <a:spcPts val="600"/>
@@ -3037,7 +3747,7 @@
               <a:buChar char="•"/>
             </a:pPr>
             <a:r>
-              <a:rPr lang="en-US" sz="1600" dirty="0">
+              <a:rPr lang="en-US" sz="1500" dirty="0">
                 <a:solidFill>
                   <a:srgbClr val="2D3748"/>
                 </a:solidFill>
@@ -3047,12 +3757,12 @@
               </a:rPr>
               <a:t>CS en PS berekenen en in een grafiek herkennen</a:t>
             </a:r>
-            <a:endParaRPr lang="en-US" sz="1600" dirty="0"/>
+            <a:endParaRPr lang="en-US" sz="1500" dirty="0"/>
           </a:p>
           <a:p>
             <a:pPr marL="342900" indent="-342900">
               <a:lnSpc>
-                <a:spcPct val="145000"/>
+                <a:spcPct val="140000"/>
               </a:lnSpc>
               <a:spcAft>
                 <a:spcPts val="600"/>
@@ -3061,7 +3771,7 @@
               <a:buChar char="•"/>
             </a:pPr>
             <a:r>
-              <a:rPr lang="en-US" sz="1600" dirty="0">
+              <a:rPr lang="en-US" sz="1500" dirty="0">
                 <a:solidFill>
                   <a:srgbClr val="2D3748"/>
                 </a:solidFill>
@@ -3071,7 +3781,7 @@
               </a:rPr>
               <a:t>De lange termijn voorspellen: MK = GTK</a:t>
             </a:r>
-            <a:endParaRPr lang="en-US" sz="1600" dirty="0"/>
+            <a:endParaRPr lang="en-US" sz="1500" dirty="0"/>
           </a:p>
         </p:txBody>
       </p:sp>
@@ -3147,12 +3857,12 @@
         </p:nvSpPr>
         <p:spPr>
           <a:xfrm>
-            <a:off x="457200" y="960120"/>
-            <a:ext cx="8229600" cy="749808"/>
+            <a:off x="457200" y="1005840"/>
+            <a:ext cx="3931920" cy="1371600"/>
           </a:xfrm>
           <a:prstGeom prst="rect">
             <a:avLst>
-              <a:gd name="adj" fmla="val 6098"/>
+              <a:gd name="adj" fmla="val 3333"/>
             </a:avLst>
           </a:prstGeom>
           <a:solidFill>
@@ -3176,8 +3886,8 @@
         </p:nvSpPr>
         <p:spPr>
           <a:xfrm>
-            <a:off x="457200" y="960120"/>
-            <a:ext cx="54864" cy="749808"/>
+            <a:off x="457200" y="1005840"/>
+            <a:ext cx="54864" cy="1371600"/>
           </a:xfrm>
           <a:prstGeom prst="rect">
             <a:avLst/>
@@ -3196,8 +3906,8 @@
         </p:nvSpPr>
         <p:spPr>
           <a:xfrm>
-            <a:off x="658368" y="1005840"/>
-            <a:ext cx="7772400" cy="320040"/>
+            <a:off x="640080" y="1143000"/>
+            <a:ext cx="3611880" cy="365760"/>
           </a:xfrm>
           <a:prstGeom prst="rect">
             <a:avLst/>
@@ -3206,14 +3916,14 @@
           <a:ln/>
         </p:spPr>
         <p:txBody>
-          <a:bodyPr wrap="square" rtlCol="0" anchor="ctr"/>
+          <a:bodyPr wrap="square" rtlCol="0" anchor="t"/>
           <a:lstStyle/>
           <a:p>
             <a:pPr indent="0" marL="0">
               <a:buNone/>
             </a:pPr>
             <a:r>
-              <a:rPr lang="en-US" sz="1800" b="1" dirty="0">
+              <a:rPr lang="en-US" sz="2000" b="1" dirty="0">
                 <a:solidFill>
                   <a:srgbClr val="1A5276"/>
                 </a:solidFill>
@@ -3223,7 +3933,7 @@
               </a:rPr>
               <a:t>Veel aanbieders</a:t>
             </a:r>
-            <a:endParaRPr lang="en-US" sz="1800" dirty="0"/>
+            <a:endParaRPr lang="en-US" sz="2000" dirty="0"/>
           </a:p>
         </p:txBody>
       </p:sp>
@@ -3235,8 +3945,8 @@
         </p:nvSpPr>
         <p:spPr>
           <a:xfrm>
-            <a:off x="658368" y="1325880"/>
-            <a:ext cx="7772400" cy="320040"/>
+            <a:off x="640080" y="1554480"/>
+            <a:ext cx="3611880" cy="685800"/>
           </a:xfrm>
           <a:prstGeom prst="rect">
             <a:avLst/>
@@ -3245,10 +3955,13 @@
           <a:ln/>
         </p:spPr>
         <p:txBody>
-          <a:bodyPr wrap="square" rtlCol="0" anchor="ctr"/>
-          <a:lstStyle/>
-          <a:p>
-            <a:pPr indent="0" marL="0">
+          <a:bodyPr wrap="square" rtlCol="0" anchor="t"/>
+          <a:lstStyle/>
+          <a:p>
+            <a:pPr algn="l" indent="0" marL="0">
+              <a:lnSpc>
+                <a:spcPct val="115000"/>
+              </a:lnSpc>
               <a:buNone/>
             </a:pPr>
             <a:r>
@@ -3274,16 +3987,16 @@
         </p:nvSpPr>
         <p:spPr>
           <a:xfrm>
-            <a:off x="457200" y="1874520"/>
-            <a:ext cx="8229600" cy="749808"/>
+            <a:off x="4754880" y="1005840"/>
+            <a:ext cx="3931920" cy="1371600"/>
           </a:xfrm>
           <a:prstGeom prst="rect">
             <a:avLst>
-              <a:gd name="adj" fmla="val 6098"/>
+              <a:gd name="adj" fmla="val 3333"/>
             </a:avLst>
           </a:prstGeom>
           <a:solidFill>
-            <a:srgbClr val="F7F8FA"/>
+            <a:srgbClr val="F9F6F1"/>
           </a:solidFill>
           <a:ln/>
           <a:effectLst>
@@ -3303,8 +4016,8 @@
         </p:nvSpPr>
         <p:spPr>
           <a:xfrm>
-            <a:off x="457200" y="1874520"/>
-            <a:ext cx="54864" cy="749808"/>
+            <a:off x="4754880" y="1005840"/>
+            <a:ext cx="54864" cy="1371600"/>
           </a:xfrm>
           <a:prstGeom prst="rect">
             <a:avLst/>
@@ -3323,8 +4036,8 @@
         </p:nvSpPr>
         <p:spPr>
           <a:xfrm>
-            <a:off x="658368" y="1920240"/>
-            <a:ext cx="7772400" cy="320040"/>
+            <a:off x="4937760" y="1143000"/>
+            <a:ext cx="3611880" cy="365760"/>
           </a:xfrm>
           <a:prstGeom prst="rect">
             <a:avLst/>
@@ -3333,14 +4046,14 @@
           <a:ln/>
         </p:spPr>
         <p:txBody>
-          <a:bodyPr wrap="square" rtlCol="0" anchor="ctr"/>
+          <a:bodyPr wrap="square" rtlCol="0" anchor="t"/>
           <a:lstStyle/>
           <a:p>
             <a:pPr indent="0" marL="0">
               <a:buNone/>
             </a:pPr>
             <a:r>
-              <a:rPr lang="en-US" sz="1800" b="1" dirty="0">
+              <a:rPr lang="en-US" sz="2000" b="1" dirty="0">
                 <a:solidFill>
                   <a:srgbClr val="1A5276"/>
                 </a:solidFill>
@@ -3350,7 +4063,7 @@
               </a:rPr>
               <a:t>Homogeen product</a:t>
             </a:r>
-            <a:endParaRPr lang="en-US" sz="1800" dirty="0"/>
+            <a:endParaRPr lang="en-US" sz="2000" dirty="0"/>
           </a:p>
         </p:txBody>
       </p:sp>
@@ -3362,8 +4075,8 @@
         </p:nvSpPr>
         <p:spPr>
           <a:xfrm>
-            <a:off x="658368" y="2240280"/>
-            <a:ext cx="7772400" cy="320040"/>
+            <a:off x="4937760" y="1554480"/>
+            <a:ext cx="3611880" cy="685800"/>
           </a:xfrm>
           <a:prstGeom prst="rect">
             <a:avLst/>
@@ -3372,10 +4085,13 @@
           <a:ln/>
         </p:spPr>
         <p:txBody>
-          <a:bodyPr wrap="square" rtlCol="0" anchor="ctr"/>
-          <a:lstStyle/>
-          <a:p>
-            <a:pPr indent="0" marL="0">
+          <a:bodyPr wrap="square" rtlCol="0" anchor="t"/>
+          <a:lstStyle/>
+          <a:p>
+            <a:pPr algn="l" indent="0" marL="0">
+              <a:lnSpc>
+                <a:spcPct val="115000"/>
+              </a:lnSpc>
               <a:buNone/>
             </a:pPr>
             <a:r>
@@ -3401,12 +4117,12 @@
         </p:nvSpPr>
         <p:spPr>
           <a:xfrm>
-            <a:off x="457200" y="2788920"/>
-            <a:ext cx="8229600" cy="749808"/>
+            <a:off x="457200" y="2606040"/>
+            <a:ext cx="3931920" cy="1371600"/>
           </a:xfrm>
           <a:prstGeom prst="rect">
             <a:avLst>
-              <a:gd name="adj" fmla="val 6098"/>
+              <a:gd name="adj" fmla="val 3333"/>
             </a:avLst>
           </a:prstGeom>
           <a:solidFill>
@@ -3430,14 +4146,14 @@
         </p:nvSpPr>
         <p:spPr>
           <a:xfrm>
-            <a:off x="457200" y="2788920"/>
-            <a:ext cx="54864" cy="749808"/>
+            <a:off x="457200" y="2606040"/>
+            <a:ext cx="54864" cy="1371600"/>
           </a:xfrm>
           <a:prstGeom prst="rect">
             <a:avLst/>
           </a:prstGeom>
           <a:solidFill>
-            <a:srgbClr val="1A5276"/>
+            <a:srgbClr val="1E8449"/>
           </a:solidFill>
           <a:ln/>
         </p:spPr>
@@ -3450,8 +4166,8 @@
         </p:nvSpPr>
         <p:spPr>
           <a:xfrm>
-            <a:off x="658368" y="2834640"/>
-            <a:ext cx="7772400" cy="320040"/>
+            <a:off x="640080" y="2743200"/>
+            <a:ext cx="3611880" cy="365760"/>
           </a:xfrm>
           <a:prstGeom prst="rect">
             <a:avLst/>
@@ -3460,16 +4176,16 @@
           <a:ln/>
         </p:spPr>
         <p:txBody>
-          <a:bodyPr wrap="square" rtlCol="0" anchor="ctr"/>
+          <a:bodyPr wrap="square" rtlCol="0" anchor="t"/>
           <a:lstStyle/>
           <a:p>
             <a:pPr indent="0" marL="0">
               <a:buNone/>
             </a:pPr>
             <a:r>
-              <a:rPr lang="en-US" sz="1800" b="1" dirty="0">
-                <a:solidFill>
-                  <a:srgbClr val="1A5276"/>
+              <a:rPr lang="en-US" sz="2000" b="1" dirty="0">
+                <a:solidFill>
+                  <a:srgbClr val="1E8449"/>
                 </a:solidFill>
                 <a:latin typeface="Arial" pitchFamily="34" charset="0"/>
                 <a:ea typeface="Arial" pitchFamily="34" charset="-122"/>
@@ -3477,7 +4193,7 @@
               </a:rPr>
               <a:t>Vrije toe-/uittreding</a:t>
             </a:r>
-            <a:endParaRPr lang="en-US" sz="1800" dirty="0"/>
+            <a:endParaRPr lang="en-US" sz="2000" dirty="0"/>
           </a:p>
         </p:txBody>
       </p:sp>
@@ -3489,8 +4205,8 @@
         </p:nvSpPr>
         <p:spPr>
           <a:xfrm>
-            <a:off x="658368" y="3154680"/>
-            <a:ext cx="7772400" cy="320040"/>
+            <a:off x="640080" y="3154680"/>
+            <a:ext cx="3611880" cy="685800"/>
           </a:xfrm>
           <a:prstGeom prst="rect">
             <a:avLst/>
@@ -3499,10 +4215,13 @@
           <a:ln/>
         </p:spPr>
         <p:txBody>
-          <a:bodyPr wrap="square" rtlCol="0" anchor="ctr"/>
-          <a:lstStyle/>
-          <a:p>
-            <a:pPr indent="0" marL="0">
+          <a:bodyPr wrap="square" rtlCol="0" anchor="t"/>
+          <a:lstStyle/>
+          <a:p>
+            <a:pPr algn="l" indent="0" marL="0">
+              <a:lnSpc>
+                <a:spcPct val="115000"/>
+              </a:lnSpc>
               <a:buNone/>
             </a:pPr>
             <a:r>
@@ -3528,16 +4247,16 @@
         </p:nvSpPr>
         <p:spPr>
           <a:xfrm>
-            <a:off x="457200" y="3703320"/>
-            <a:ext cx="8229600" cy="749808"/>
+            <a:off x="4754880" y="2606040"/>
+            <a:ext cx="3931920" cy="1371600"/>
           </a:xfrm>
           <a:prstGeom prst="rect">
             <a:avLst>
-              <a:gd name="adj" fmla="val 6098"/>
+              <a:gd name="adj" fmla="val 3333"/>
             </a:avLst>
           </a:prstGeom>
           <a:solidFill>
-            <a:srgbClr val="F7F8FA"/>
+            <a:srgbClr val="F9F6F1"/>
           </a:solidFill>
           <a:ln/>
           <a:effectLst>
@@ -3557,14 +4276,14 @@
         </p:nvSpPr>
         <p:spPr>
           <a:xfrm>
-            <a:off x="457200" y="3703320"/>
-            <a:ext cx="54864" cy="749808"/>
+            <a:off x="4754880" y="2606040"/>
+            <a:ext cx="54864" cy="1371600"/>
           </a:xfrm>
           <a:prstGeom prst="rect">
             <a:avLst/>
           </a:prstGeom>
           <a:solidFill>
-            <a:srgbClr val="1A5276"/>
+            <a:srgbClr val="E67E22"/>
           </a:solidFill>
           <a:ln/>
         </p:spPr>
@@ -3577,8 +4296,8 @@
         </p:nvSpPr>
         <p:spPr>
           <a:xfrm>
-            <a:off x="658368" y="3749040"/>
-            <a:ext cx="7772400" cy="320040"/>
+            <a:off x="4937760" y="2743200"/>
+            <a:ext cx="3611880" cy="365760"/>
           </a:xfrm>
           <a:prstGeom prst="rect">
             <a:avLst/>
@@ -3587,16 +4306,16 @@
           <a:ln/>
         </p:spPr>
         <p:txBody>
-          <a:bodyPr wrap="square" rtlCol="0" anchor="ctr"/>
+          <a:bodyPr wrap="square" rtlCol="0" anchor="t"/>
           <a:lstStyle/>
           <a:p>
             <a:pPr indent="0" marL="0">
               <a:buNone/>
             </a:pPr>
             <a:r>
-              <a:rPr lang="en-US" sz="1800" b="1" dirty="0">
-                <a:solidFill>
-                  <a:srgbClr val="1A5276"/>
+              <a:rPr lang="en-US" sz="2000" b="1" dirty="0">
+                <a:solidFill>
+                  <a:srgbClr val="E67E22"/>
                 </a:solidFill>
                 <a:latin typeface="Arial" pitchFamily="34" charset="0"/>
                 <a:ea typeface="Arial" pitchFamily="34" charset="-122"/>
@@ -3604,7 +4323,7 @@
               </a:rPr>
               <a:t>Prijsnemer</a:t>
             </a:r>
-            <a:endParaRPr lang="en-US" sz="1800" dirty="0"/>
+            <a:endParaRPr lang="en-US" sz="2000" dirty="0"/>
           </a:p>
         </p:txBody>
       </p:sp>
@@ -3616,8 +4335,8 @@
         </p:nvSpPr>
         <p:spPr>
           <a:xfrm>
-            <a:off x="658368" y="4069080"/>
-            <a:ext cx="7772400" cy="320040"/>
+            <a:off x="4937760" y="3154680"/>
+            <a:ext cx="3611880" cy="685800"/>
           </a:xfrm>
           <a:prstGeom prst="rect">
             <a:avLst/>
@@ -3626,10 +4345,13 @@
           <a:ln/>
         </p:spPr>
         <p:txBody>
-          <a:bodyPr wrap="square" rtlCol="0" anchor="ctr"/>
-          <a:lstStyle/>
-          <a:p>
-            <a:pPr indent="0" marL="0">
+          <a:bodyPr wrap="square" rtlCol="0" anchor="t"/>
+          <a:lstStyle/>
+          <a:p>
+            <a:pPr algn="l" indent="0" marL="0">
+              <a:lnSpc>
+                <a:spcPct val="115000"/>
+              </a:lnSpc>
               <a:buNone/>
             </a:pPr>
             <a:r>
@@ -3719,53 +4441,37 @@
         </p:nvSpPr>
         <p:spPr>
           <a:xfrm>
-            <a:off x="640080" y="960120"/>
-            <a:ext cx="7863840" cy="731520"/>
-          </a:xfrm>
-          <a:prstGeom prst="rect">
-            <a:avLst/>
+            <a:off x="1371600" y="1005840"/>
+            <a:ext cx="6400800" cy="594360"/>
+          </a:xfrm>
+          <a:prstGeom prst="rect">
+            <a:avLst>
+              <a:gd name="adj" fmla="val 7692"/>
+            </a:avLst>
           </a:prstGeom>
           <a:solidFill>
             <a:srgbClr val="F7F8FA"/>
           </a:solidFill>
-          <a:ln w="6350">
-            <a:solidFill>
-              <a:srgbClr val="CBD5E0"/>
-            </a:solidFill>
-            <a:prstDash val="solid"/>
-          </a:ln>
-        </p:spPr>
-      </p:sp>
-      <p:sp>
-        <p:nvSpPr>
-          <p:cNvPr id="4" name="Shape 2"/>
-          <p:cNvSpPr/>
-          <p:nvPr/>
-        </p:nvSpPr>
-        <p:spPr>
-          <a:xfrm>
-            <a:off x="640080" y="960120"/>
-            <a:ext cx="54864" cy="731520"/>
-          </a:xfrm>
-          <a:prstGeom prst="rect">
-            <a:avLst/>
-          </a:prstGeom>
-          <a:solidFill>
-            <a:srgbClr val="718096"/>
-          </a:solidFill>
-          <a:ln/>
-        </p:spPr>
-      </p:sp>
-      <p:sp>
-        <p:nvSpPr>
-          <p:cNvPr id="5" name="Text 3"/>
-          <p:cNvSpPr/>
-          <p:nvPr/>
-        </p:nvSpPr>
-        <p:spPr>
-          <a:xfrm>
-            <a:off x="868680" y="960120"/>
-            <a:ext cx="2286000" cy="731520"/>
+          <a:ln/>
+          <a:effectLst>
+            <a:outerShdw sx="100000" sy="100000" kx="0" ky="0" algn="bl" rotWithShape="0" blurRad="76200" dist="25400" dir="8100000">
+              <a:srgbClr val="000000">
+                <a:alpha val="10000"/>
+              </a:srgbClr>
+            </a:outerShdw>
+          </a:effectLst>
+        </p:spPr>
+      </p:sp>
+      <p:sp>
+        <p:nvSpPr>
+          <p:cNvPr id="4" name="Text 2"/>
+          <p:cNvSpPr/>
+          <p:nvPr/>
+        </p:nvSpPr>
+        <p:spPr>
+          <a:xfrm>
+            <a:off x="1554480" y="1005840"/>
+            <a:ext cx="6035040" cy="594360"/>
           </a:xfrm>
           <a:prstGeom prst="rect">
             <a:avLst/>
@@ -3789,33 +4495,8 @@
                 <a:ea typeface="Arial" pitchFamily="34" charset="-122"/>
                 <a:cs typeface="Arial" pitchFamily="34" charset="-120"/>
               </a:rPr>
-              <a:t>Gegeven</a:t>
-            </a:r>
-            <a:endParaRPr lang="en-US" sz="1400" dirty="0"/>
-          </a:p>
-        </p:txBody>
-      </p:sp>
-      <p:sp>
-        <p:nvSpPr>
-          <p:cNvPr id="6" name="Text 4"/>
-          <p:cNvSpPr/>
-          <p:nvPr/>
-        </p:nvSpPr>
-        <p:spPr>
-          <a:xfrm>
-            <a:off x="3200400" y="960120"/>
-            <a:ext cx="5029200" cy="731520"/>
-          </a:xfrm>
-          <a:prstGeom prst="rect">
-            <a:avLst/>
-          </a:prstGeom>
-          <a:noFill/>
-          <a:ln/>
-        </p:spPr>
-        <p:txBody>
-          <a:bodyPr wrap="square" rtlCol="0" anchor="ctr"/>
-          <a:lstStyle/>
-          <a:p>
+              <a:t>Gegeven:  </a:t>
+            </a:r>
             <a:pPr indent="0" marL="0">
               <a:buNone/>
             </a:pPr>
@@ -3830,20 +4511,88 @@
               </a:rPr>
               <a:t>TK = 0,5q² + 10q + 128</a:t>
             </a:r>
+            <a:endParaRPr lang="en-US" sz="1400" dirty="0"/>
+          </a:p>
+        </p:txBody>
+      </p:sp>
+      <p:sp>
+        <p:nvSpPr>
+          <p:cNvPr id="5" name="Text 3"/>
+          <p:cNvSpPr/>
+          <p:nvPr/>
+        </p:nvSpPr>
+        <p:spPr>
+          <a:xfrm>
+            <a:off x="1371600" y="1600200"/>
+            <a:ext cx="6400800" cy="182880"/>
+          </a:xfrm>
+          <a:prstGeom prst="rect">
+            <a:avLst/>
+          </a:prstGeom>
+          <a:noFill/>
+          <a:ln/>
+        </p:spPr>
+        <p:txBody>
+          <a:bodyPr wrap="square" rtlCol="0" anchor="ctr"/>
+          <a:lstStyle/>
+          <a:p>
+            <a:pPr algn="ctr" indent="0" marL="0">
+              <a:buNone/>
+            </a:pPr>
+            <a:r>
+              <a:rPr lang="en-US" sz="1600" b="1" dirty="0">
+                <a:solidFill>
+                  <a:srgbClr val="1A5276"/>
+                </a:solidFill>
+                <a:latin typeface="Arial" pitchFamily="34" charset="0"/>
+                <a:ea typeface="Arial" pitchFamily="34" charset="-122"/>
+                <a:cs typeface="Arial" pitchFamily="34" charset="-120"/>
+              </a:rPr>
+              <a:t>↓</a:t>
+            </a:r>
             <a:endParaRPr lang="en-US" sz="1600" dirty="0"/>
           </a:p>
         </p:txBody>
       </p:sp>
       <p:sp>
         <p:nvSpPr>
+          <p:cNvPr id="6" name="Shape 4"/>
+          <p:cNvSpPr/>
+          <p:nvPr/>
+        </p:nvSpPr>
+        <p:spPr>
+          <a:xfrm>
+            <a:off x="1371600" y="1783080"/>
+            <a:ext cx="6400800" cy="594360"/>
+          </a:xfrm>
+          <a:prstGeom prst="rect">
+            <a:avLst>
+              <a:gd name="adj" fmla="val 7692"/>
+            </a:avLst>
+          </a:prstGeom>
+          <a:solidFill>
+            <a:srgbClr val="EBF5FB"/>
+          </a:solidFill>
+          <a:ln/>
+          <a:effectLst>
+            <a:outerShdw sx="100000" sy="100000" kx="0" ky="0" algn="bl" rotWithShape="0" blurRad="76200" dist="25400" dir="8100000">
+              <a:srgbClr val="000000">
+                <a:alpha val="10000"/>
+              </a:srgbClr>
+            </a:outerShdw>
+          </a:effectLst>
+        </p:spPr>
+      </p:sp>
+      <p:sp>
+        <p:nvSpPr>
           <p:cNvPr id="7" name="Text 5"/>
           <p:cNvSpPr/>
           <p:nvPr/>
         </p:nvSpPr>
         <p:spPr>
           <a:xfrm>
-            <a:off x="640080" y="1691640"/>
-            <a:ext cx="7863840" cy="182880"/>
+            <a:off x="1554480" y="1783080"/>
+            <a:ext cx="6035040" cy="594360"/>
           </a:xfrm>
           <a:prstGeom prst="rect">
             <a:avLst/>
@@ -3855,11 +4604,11 @@
           <a:bodyPr wrap="square" rtlCol="0" anchor="ctr"/>
           <a:lstStyle/>
           <a:p>
-            <a:pPr algn="ctr" indent="0" marL="0">
-              <a:buNone/>
-            </a:pPr>
-            <a:r>
-              <a:rPr lang="en-US" sz="1200" dirty="0">
+            <a:pPr indent="0" marL="0">
+              <a:buNone/>
+            </a:pPr>
+            <a:r>
+              <a:rPr lang="en-US" sz="1400" b="1" dirty="0">
                 <a:solidFill>
                   <a:srgbClr val="718096"/>
                 </a:solidFill>
@@ -3867,117 +4616,8 @@
                 <a:ea typeface="Arial" pitchFamily="34" charset="-122"/>
                 <a:cs typeface="Arial" pitchFamily="34" charset="-120"/>
               </a:rPr>
-              <a:t>↓</a:t>
-            </a:r>
-            <a:endParaRPr lang="en-US" sz="1200" dirty="0"/>
-          </a:p>
-        </p:txBody>
-      </p:sp>
-      <p:sp>
-        <p:nvSpPr>
-          <p:cNvPr id="8" name="Shape 6"/>
-          <p:cNvSpPr/>
-          <p:nvPr/>
-        </p:nvSpPr>
-        <p:spPr>
-          <a:xfrm>
-            <a:off x="640080" y="1874520"/>
-            <a:ext cx="7863840" cy="731520"/>
-          </a:xfrm>
-          <a:prstGeom prst="rect">
-            <a:avLst/>
-          </a:prstGeom>
-          <a:solidFill>
-            <a:srgbClr val="F7F8FA"/>
-          </a:solidFill>
-          <a:ln w="6350">
-            <a:solidFill>
-              <a:srgbClr val="CBD5E0"/>
-            </a:solidFill>
-            <a:prstDash val="solid"/>
-          </a:ln>
-        </p:spPr>
-      </p:sp>
-      <p:sp>
-        <p:nvSpPr>
-          <p:cNvPr id="9" name="Shape 7"/>
-          <p:cNvSpPr/>
-          <p:nvPr/>
-        </p:nvSpPr>
-        <p:spPr>
-          <a:xfrm>
-            <a:off x="640080" y="1874520"/>
-            <a:ext cx="54864" cy="731520"/>
-          </a:xfrm>
-          <a:prstGeom prst="rect">
-            <a:avLst/>
-          </a:prstGeom>
-          <a:solidFill>
-            <a:srgbClr val="718096"/>
-          </a:solidFill>
-          <a:ln/>
-        </p:spPr>
-      </p:sp>
-      <p:sp>
-        <p:nvSpPr>
-          <p:cNvPr id="10" name="Text 8"/>
-          <p:cNvSpPr/>
-          <p:nvPr/>
-        </p:nvSpPr>
-        <p:spPr>
-          <a:xfrm>
-            <a:off x="868680" y="1874520"/>
-            <a:ext cx="2286000" cy="731520"/>
-          </a:xfrm>
-          <a:prstGeom prst="rect">
-            <a:avLst/>
-          </a:prstGeom>
-          <a:noFill/>
-          <a:ln/>
-        </p:spPr>
-        <p:txBody>
-          <a:bodyPr wrap="square" rtlCol="0" anchor="ctr"/>
-          <a:lstStyle/>
-          <a:p>
-            <a:pPr indent="0" marL="0">
-              <a:buNone/>
-            </a:pPr>
-            <a:r>
-              <a:rPr lang="en-US" sz="1400" b="1" dirty="0">
-                <a:solidFill>
-                  <a:srgbClr val="718096"/>
-                </a:solidFill>
-                <a:latin typeface="Arial" pitchFamily="34" charset="0"/>
-                <a:ea typeface="Arial" pitchFamily="34" charset="-122"/>
-                <a:cs typeface="Arial" pitchFamily="34" charset="-120"/>
-              </a:rPr>
-              <a:t>Stap 1: Afleiden</a:t>
-            </a:r>
-            <a:endParaRPr lang="en-US" sz="1400" dirty="0"/>
-          </a:p>
-        </p:txBody>
-      </p:sp>
-      <p:sp>
-        <p:nvSpPr>
-          <p:cNvPr id="11" name="Text 9"/>
-          <p:cNvSpPr/>
-          <p:nvPr/>
-        </p:nvSpPr>
-        <p:spPr>
-          <a:xfrm>
-            <a:off x="3200400" y="1874520"/>
-            <a:ext cx="5029200" cy="731520"/>
-          </a:xfrm>
-          <a:prstGeom prst="rect">
-            <a:avLst/>
-          </a:prstGeom>
-          <a:noFill/>
-          <a:ln/>
-        </p:spPr>
-        <p:txBody>
-          <a:bodyPr wrap="square" rtlCol="0" anchor="ctr"/>
-          <a:lstStyle/>
-          <a:p>
+              <a:t>Stap 1: Afleiden:  </a:t>
+            </a:r>
             <a:pPr indent="0" marL="0">
               <a:buNone/>
             </a:pPr>
@@ -3992,20 +4632,88 @@
               </a:rPr>
               <a:t>MK = TK′ = q + 10</a:t>
             </a:r>
+            <a:endParaRPr lang="en-US" sz="1400" dirty="0"/>
+          </a:p>
+        </p:txBody>
+      </p:sp>
+      <p:sp>
+        <p:nvSpPr>
+          <p:cNvPr id="8" name="Text 6"/>
+          <p:cNvSpPr/>
+          <p:nvPr/>
+        </p:nvSpPr>
+        <p:spPr>
+          <a:xfrm>
+            <a:off x="1371600" y="2377440"/>
+            <a:ext cx="6400800" cy="182880"/>
+          </a:xfrm>
+          <a:prstGeom prst="rect">
+            <a:avLst/>
+          </a:prstGeom>
+          <a:noFill/>
+          <a:ln/>
+        </p:spPr>
+        <p:txBody>
+          <a:bodyPr wrap="square" rtlCol="0" anchor="ctr"/>
+          <a:lstStyle/>
+          <a:p>
+            <a:pPr algn="ctr" indent="0" marL="0">
+              <a:buNone/>
+            </a:pPr>
+            <a:r>
+              <a:rPr lang="en-US" sz="1600" b="1" dirty="0">
+                <a:solidFill>
+                  <a:srgbClr val="1A5276"/>
+                </a:solidFill>
+                <a:latin typeface="Arial" pitchFamily="34" charset="0"/>
+                <a:ea typeface="Arial" pitchFamily="34" charset="-122"/>
+                <a:cs typeface="Arial" pitchFamily="34" charset="-120"/>
+              </a:rPr>
+              <a:t>↓</a:t>
+            </a:r>
             <a:endParaRPr lang="en-US" sz="1600" dirty="0"/>
           </a:p>
         </p:txBody>
       </p:sp>
       <p:sp>
         <p:nvSpPr>
-          <p:cNvPr id="12" name="Text 10"/>
-          <p:cNvSpPr/>
-          <p:nvPr/>
-        </p:nvSpPr>
-        <p:spPr>
-          <a:xfrm>
-            <a:off x="640080" y="2606040"/>
-            <a:ext cx="7863840" cy="182880"/>
+          <p:cNvPr id="9" name="Shape 7"/>
+          <p:cNvSpPr/>
+          <p:nvPr/>
+        </p:nvSpPr>
+        <p:spPr>
+          <a:xfrm>
+            <a:off x="1371600" y="2560320"/>
+            <a:ext cx="6400800" cy="594360"/>
+          </a:xfrm>
+          <a:prstGeom prst="rect">
+            <a:avLst>
+              <a:gd name="adj" fmla="val 7692"/>
+            </a:avLst>
+          </a:prstGeom>
+          <a:solidFill>
+            <a:srgbClr val="EBF5FB"/>
+          </a:solidFill>
+          <a:ln/>
+          <a:effectLst>
+            <a:outerShdw sx="100000" sy="100000" kx="0" ky="0" algn="bl" rotWithShape="0" blurRad="76200" dist="25400" dir="8100000">
+              <a:srgbClr val="000000">
+                <a:alpha val="10000"/>
+              </a:srgbClr>
+            </a:outerShdw>
+          </a:effectLst>
+        </p:spPr>
+      </p:sp>
+      <p:sp>
+        <p:nvSpPr>
+          <p:cNvPr id="10" name="Text 8"/>
+          <p:cNvSpPr/>
+          <p:nvPr/>
+        </p:nvSpPr>
+        <p:spPr>
+          <a:xfrm>
+            <a:off x="1554480" y="2560320"/>
+            <a:ext cx="6035040" cy="594360"/>
           </a:xfrm>
           <a:prstGeom prst="rect">
             <a:avLst/>
@@ -4017,11 +4725,11 @@
           <a:bodyPr wrap="square" rtlCol="0" anchor="ctr"/>
           <a:lstStyle/>
           <a:p>
-            <a:pPr algn="ctr" indent="0" marL="0">
-              <a:buNone/>
-            </a:pPr>
-            <a:r>
-              <a:rPr lang="en-US" sz="1200" dirty="0">
+            <a:pPr indent="0" marL="0">
+              <a:buNone/>
+            </a:pPr>
+            <a:r>
+              <a:rPr lang="en-US" sz="1400" b="1" dirty="0">
                 <a:solidFill>
                   <a:srgbClr val="718096"/>
                 </a:solidFill>
@@ -4029,117 +4737,8 @@
                 <a:ea typeface="Arial" pitchFamily="34" charset="-122"/>
                 <a:cs typeface="Arial" pitchFamily="34" charset="-120"/>
               </a:rPr>
-              <a:t>↓</a:t>
-            </a:r>
-            <a:endParaRPr lang="en-US" sz="1200" dirty="0"/>
-          </a:p>
-        </p:txBody>
-      </p:sp>
-      <p:sp>
-        <p:nvSpPr>
-          <p:cNvPr id="13" name="Shape 11"/>
-          <p:cNvSpPr/>
-          <p:nvPr/>
-        </p:nvSpPr>
-        <p:spPr>
-          <a:xfrm>
-            <a:off x="640080" y="2788920"/>
-            <a:ext cx="7863840" cy="731520"/>
-          </a:xfrm>
-          <a:prstGeom prst="rect">
-            <a:avLst/>
-          </a:prstGeom>
-          <a:solidFill>
-            <a:srgbClr val="F7F8FA"/>
-          </a:solidFill>
-          <a:ln w="6350">
-            <a:solidFill>
-              <a:srgbClr val="CBD5E0"/>
-            </a:solidFill>
-            <a:prstDash val="solid"/>
-          </a:ln>
-        </p:spPr>
-      </p:sp>
-      <p:sp>
-        <p:nvSpPr>
-          <p:cNvPr id="14" name="Shape 12"/>
-          <p:cNvSpPr/>
-          <p:nvPr/>
-        </p:nvSpPr>
-        <p:spPr>
-          <a:xfrm>
-            <a:off x="640080" y="2788920"/>
-            <a:ext cx="54864" cy="731520"/>
-          </a:xfrm>
-          <a:prstGeom prst="rect">
-            <a:avLst/>
-          </a:prstGeom>
-          <a:solidFill>
-            <a:srgbClr val="718096"/>
-          </a:solidFill>
-          <a:ln/>
-        </p:spPr>
-      </p:sp>
-      <p:sp>
-        <p:nvSpPr>
-          <p:cNvPr id="15" name="Text 13"/>
-          <p:cNvSpPr/>
-          <p:nvPr/>
-        </p:nvSpPr>
-        <p:spPr>
-          <a:xfrm>
-            <a:off x="868680" y="2788920"/>
-            <a:ext cx="2286000" cy="731520"/>
-          </a:xfrm>
-          <a:prstGeom prst="rect">
-            <a:avLst/>
-          </a:prstGeom>
-          <a:noFill/>
-          <a:ln/>
-        </p:spPr>
-        <p:txBody>
-          <a:bodyPr wrap="square" rtlCol="0" anchor="ctr"/>
-          <a:lstStyle/>
-          <a:p>
-            <a:pPr indent="0" marL="0">
-              <a:buNone/>
-            </a:pPr>
-            <a:r>
-              <a:rPr lang="en-US" sz="1400" b="1" dirty="0">
-                <a:solidFill>
-                  <a:srgbClr val="718096"/>
-                </a:solidFill>
-                <a:latin typeface="Arial" pitchFamily="34" charset="0"/>
-                <a:ea typeface="Arial" pitchFamily="34" charset="-122"/>
-                <a:cs typeface="Arial" pitchFamily="34" charset="-120"/>
-              </a:rPr>
-              <a:t>Stap 2: Prijsnemer</a:t>
-            </a:r>
-            <a:endParaRPr lang="en-US" sz="1400" dirty="0"/>
-          </a:p>
-        </p:txBody>
-      </p:sp>
-      <p:sp>
-        <p:nvSpPr>
-          <p:cNvPr id="16" name="Text 14"/>
-          <p:cNvSpPr/>
-          <p:nvPr/>
-        </p:nvSpPr>
-        <p:spPr>
-          <a:xfrm>
-            <a:off x="3200400" y="2788920"/>
-            <a:ext cx="5029200" cy="731520"/>
-          </a:xfrm>
-          <a:prstGeom prst="rect">
-            <a:avLst/>
-          </a:prstGeom>
-          <a:noFill/>
-          <a:ln/>
-        </p:spPr>
-        <p:txBody>
-          <a:bodyPr wrap="square" rtlCol="0" anchor="ctr"/>
-          <a:lstStyle/>
-          <a:p>
+              <a:t>Stap 2: Prijsnemer:  </a:t>
+            </a:r>
             <a:pPr indent="0" marL="0">
               <a:buNone/>
             </a:pPr>
@@ -4154,104 +4753,88 @@
               </a:rPr>
               <a:t>MO = p = MK</a:t>
             </a:r>
+            <a:endParaRPr lang="en-US" sz="1400" dirty="0"/>
+          </a:p>
+        </p:txBody>
+      </p:sp>
+      <p:sp>
+        <p:nvSpPr>
+          <p:cNvPr id="11" name="Text 9"/>
+          <p:cNvSpPr/>
+          <p:nvPr/>
+        </p:nvSpPr>
+        <p:spPr>
+          <a:xfrm>
+            <a:off x="1371600" y="3154680"/>
+            <a:ext cx="6400800" cy="182880"/>
+          </a:xfrm>
+          <a:prstGeom prst="rect">
+            <a:avLst/>
+          </a:prstGeom>
+          <a:noFill/>
+          <a:ln/>
+        </p:spPr>
+        <p:txBody>
+          <a:bodyPr wrap="square" rtlCol="0" anchor="ctr"/>
+          <a:lstStyle/>
+          <a:p>
+            <a:pPr algn="ctr" indent="0" marL="0">
+              <a:buNone/>
+            </a:pPr>
+            <a:r>
+              <a:rPr lang="en-US" sz="1600" b="1" dirty="0">
+                <a:solidFill>
+                  <a:srgbClr val="1A5276"/>
+                </a:solidFill>
+                <a:latin typeface="Arial" pitchFamily="34" charset="0"/>
+                <a:ea typeface="Arial" pitchFamily="34" charset="-122"/>
+                <a:cs typeface="Arial" pitchFamily="34" charset="-120"/>
+              </a:rPr>
+              <a:t>↓</a:t>
+            </a:r>
             <a:endParaRPr lang="en-US" sz="1600" dirty="0"/>
           </a:p>
         </p:txBody>
       </p:sp>
       <p:sp>
         <p:nvSpPr>
-          <p:cNvPr id="17" name="Text 15"/>
-          <p:cNvSpPr/>
-          <p:nvPr/>
-        </p:nvSpPr>
-        <p:spPr>
-          <a:xfrm>
-            <a:off x="640080" y="3520440"/>
-            <a:ext cx="7863840" cy="182880"/>
-          </a:xfrm>
-          <a:prstGeom prst="rect">
-            <a:avLst/>
-          </a:prstGeom>
-          <a:noFill/>
-          <a:ln/>
-        </p:spPr>
-        <p:txBody>
-          <a:bodyPr wrap="square" rtlCol="0" anchor="ctr"/>
-          <a:lstStyle/>
-          <a:p>
-            <a:pPr algn="ctr" indent="0" marL="0">
-              <a:buNone/>
-            </a:pPr>
-            <a:r>
-              <a:rPr lang="en-US" sz="1200" dirty="0">
-                <a:solidFill>
-                  <a:srgbClr val="718096"/>
-                </a:solidFill>
-                <a:latin typeface="Arial" pitchFamily="34" charset="0"/>
-                <a:ea typeface="Arial" pitchFamily="34" charset="-122"/>
-                <a:cs typeface="Arial" pitchFamily="34" charset="-120"/>
-              </a:rPr>
-              <a:t>↓</a:t>
-            </a:r>
-            <a:endParaRPr lang="en-US" sz="1200" dirty="0"/>
-          </a:p>
-        </p:txBody>
-      </p:sp>
-      <p:sp>
-        <p:nvSpPr>
-          <p:cNvPr id="18" name="Shape 16"/>
-          <p:cNvSpPr/>
-          <p:nvPr/>
-        </p:nvSpPr>
-        <p:spPr>
-          <a:xfrm>
-            <a:off x="640080" y="3703320"/>
-            <a:ext cx="7863840" cy="731520"/>
-          </a:xfrm>
-          <a:prstGeom prst="rect">
-            <a:avLst/>
-          </a:prstGeom>
-          <a:solidFill>
-            <a:srgbClr val="EBF5FB"/>
-          </a:solidFill>
-          <a:ln w="6350">
-            <a:solidFill>
-              <a:srgbClr val="1A5276"/>
-            </a:solidFill>
-            <a:prstDash val="solid"/>
-          </a:ln>
-        </p:spPr>
-      </p:sp>
-      <p:sp>
-        <p:nvSpPr>
-          <p:cNvPr id="19" name="Shape 17"/>
-          <p:cNvSpPr/>
-          <p:nvPr/>
-        </p:nvSpPr>
-        <p:spPr>
-          <a:xfrm>
-            <a:off x="640080" y="3703320"/>
-            <a:ext cx="54864" cy="731520"/>
-          </a:xfrm>
-          <a:prstGeom prst="rect">
-            <a:avLst/>
+          <p:cNvPr id="12" name="Shape 10"/>
+          <p:cNvSpPr/>
+          <p:nvPr/>
+        </p:nvSpPr>
+        <p:spPr>
+          <a:xfrm>
+            <a:off x="1371600" y="3337560"/>
+            <a:ext cx="6400800" cy="594360"/>
+          </a:xfrm>
+          <a:prstGeom prst="rect">
+            <a:avLst>
+              <a:gd name="adj" fmla="val 7692"/>
+            </a:avLst>
           </a:prstGeom>
           <a:solidFill>
             <a:srgbClr val="1A5276"/>
           </a:solidFill>
           <a:ln/>
-        </p:spPr>
-      </p:sp>
-      <p:sp>
-        <p:nvSpPr>
-          <p:cNvPr id="20" name="Text 18"/>
-          <p:cNvSpPr/>
-          <p:nvPr/>
-        </p:nvSpPr>
-        <p:spPr>
-          <a:xfrm>
-            <a:off x="868680" y="3703320"/>
-            <a:ext cx="2286000" cy="731520"/>
+          <a:effectLst>
+            <a:outerShdw sx="100000" sy="100000" kx="0" ky="0" algn="bl" rotWithShape="0" blurRad="76200" dist="25400" dir="8100000">
+              <a:srgbClr val="000000">
+                <a:alpha val="10000"/>
+              </a:srgbClr>
+            </a:outerShdw>
+          </a:effectLst>
+        </p:spPr>
+      </p:sp>
+      <p:sp>
+        <p:nvSpPr>
+          <p:cNvPr id="13" name="Text 11"/>
+          <p:cNvSpPr/>
+          <p:nvPr/>
+        </p:nvSpPr>
+        <p:spPr>
+          <a:xfrm>
+            <a:off x="1554480" y="3337560"/>
+            <a:ext cx="6035040" cy="594360"/>
           </a:xfrm>
           <a:prstGeom prst="rect">
             <a:avLst/>
@@ -4269,46 +4852,21 @@
             <a:r>
               <a:rPr lang="en-US" sz="1400" b="1" dirty="0">
                 <a:solidFill>
-                  <a:srgbClr val="1A5276"/>
-                </a:solidFill>
-                <a:latin typeface="Arial" pitchFamily="34" charset="0"/>
-                <a:ea typeface="Arial" pitchFamily="34" charset="-122"/>
-                <a:cs typeface="Arial" pitchFamily="34" charset="-120"/>
-              </a:rPr>
-              <a:t>Stap 3: Aanbodfunctie</a:t>
-            </a:r>
-            <a:endParaRPr lang="en-US" sz="1400" dirty="0"/>
-          </a:p>
-        </p:txBody>
-      </p:sp>
-      <p:sp>
-        <p:nvSpPr>
-          <p:cNvPr id="21" name="Text 19"/>
-          <p:cNvSpPr/>
-          <p:nvPr/>
-        </p:nvSpPr>
-        <p:spPr>
-          <a:xfrm>
-            <a:off x="3200400" y="3703320"/>
-            <a:ext cx="5029200" cy="731520"/>
-          </a:xfrm>
-          <a:prstGeom prst="rect">
-            <a:avLst/>
-          </a:prstGeom>
-          <a:noFill/>
-          <a:ln/>
-        </p:spPr>
-        <p:txBody>
-          <a:bodyPr wrap="square" rtlCol="0" anchor="ctr"/>
-          <a:lstStyle/>
-          <a:p>
+                  <a:srgbClr val="FFFFFF"/>
+                </a:solidFill>
+                <a:latin typeface="Arial" pitchFamily="34" charset="0"/>
+                <a:ea typeface="Arial" pitchFamily="34" charset="-122"/>
+                <a:cs typeface="Arial" pitchFamily="34" charset="-120"/>
+              </a:rPr>
+              <a:t>Stap 3: Aanbodfunctie:  </a:t>
+            </a:r>
             <a:pPr indent="0" marL="0">
               <a:buNone/>
             </a:pPr>
             <a:r>
-              <a:rPr lang="en-US" sz="1600" dirty="0">
-                <a:solidFill>
-                  <a:srgbClr val="2D3748"/>
+              <a:rPr lang="en-US" sz="1600" b="1" dirty="0">
+                <a:solidFill>
+                  <a:srgbClr val="FFFFFF"/>
                 </a:solidFill>
                 <a:latin typeface="Consolas" pitchFamily="34" charset="0"/>
                 <a:ea typeface="Consolas" pitchFamily="34" charset="-122"/>
@@ -4316,20 +4874,20 @@
               </a:rPr>
               <a:t>p = q + 10</a:t>
             </a:r>
-            <a:endParaRPr lang="en-US" sz="1600" dirty="0"/>
-          </a:p>
-        </p:txBody>
-      </p:sp>
-      <p:sp>
-        <p:nvSpPr>
-          <p:cNvPr id="22" name="Text 20"/>
-          <p:cNvSpPr/>
-          <p:nvPr/>
-        </p:nvSpPr>
-        <p:spPr>
-          <a:xfrm>
-            <a:off x="640080" y="4572000"/>
-            <a:ext cx="7863840" cy="365760"/>
+            <a:endParaRPr lang="en-US" sz="1400" dirty="0"/>
+          </a:p>
+        </p:txBody>
+      </p:sp>
+      <p:sp>
+        <p:nvSpPr>
+          <p:cNvPr id="14" name="Text 12"/>
+          <p:cNvSpPr/>
+          <p:nvPr/>
+        </p:nvSpPr>
+        <p:spPr>
+          <a:xfrm>
+            <a:off x="640080" y="4206240"/>
+            <a:ext cx="7863840" cy="320040"/>
           </a:xfrm>
           <a:prstGeom prst="rect">
             <a:avLst/>
@@ -4345,9 +4903,9 @@
               <a:buNone/>
             </a:pPr>
             <a:r>
-              <a:rPr lang="en-US" sz="1300" i="1" dirty="0">
-                <a:solidFill>
-                  <a:srgbClr val="718096"/>
+              <a:rPr lang="en-US" sz="1400" b="1" i="1" dirty="0">
+                <a:solidFill>
+                  <a:srgbClr val="2D3748"/>
                 </a:solidFill>
                 <a:latin typeface="Arial" pitchFamily="34" charset="0"/>
                 <a:ea typeface="Arial" pitchFamily="34" charset="-122"/>
@@ -4355,7 +4913,7 @@
               </a:rPr>
               <a:t>Bij volkomen concurrentie is de MK-lijn de aanbodfunctie.</a:t>
             </a:r>
-            <a:endParaRPr lang="en-US" sz="1300" dirty="0"/>
+            <a:endParaRPr lang="en-US" sz="1400" dirty="0"/>
           </a:p>
         </p:txBody>
       </p:sp>
@@ -4431,23 +4989,18 @@
         </p:nvSpPr>
         <p:spPr>
           <a:xfrm>
-            <a:off x="914400" y="1097280"/>
-            <a:ext cx="7315200" cy="731520"/>
+            <a:off x="1143000" y="1188720"/>
+            <a:ext cx="6858000" cy="640080"/>
           </a:xfrm>
           <a:prstGeom prst="rect">
             <a:avLst>
-              <a:gd name="adj" fmla="val 6250"/>
+              <a:gd name="adj" fmla="val 7143"/>
             </a:avLst>
           </a:prstGeom>
           <a:solidFill>
-            <a:srgbClr val="F9F6F1"/>
+            <a:srgbClr val="F7F8FA"/>
           </a:solidFill>
-          <a:ln w="12700">
-            <a:solidFill>
-              <a:srgbClr val="1A5276"/>
-            </a:solidFill>
-            <a:prstDash val="solid"/>
-          </a:ln>
+          <a:ln/>
           <a:effectLst>
             <a:outerShdw sx="100000" sy="100000" kx="0" ky="0" algn="bl" rotWithShape="0" blurRad="76200" dist="25400" dir="8100000">
               <a:srgbClr val="000000">
@@ -4465,8 +5018,8 @@
         </p:nvSpPr>
         <p:spPr>
           <a:xfrm>
-            <a:off x="1097280" y="1097280"/>
-            <a:ext cx="6949440" cy="457200"/>
+            <a:off x="1417320" y="1188720"/>
+            <a:ext cx="6309360" cy="640080"/>
           </a:xfrm>
           <a:prstGeom prst="rect">
             <a:avLst/>
@@ -4475,7 +5028,7 @@
           <a:ln/>
         </p:spPr>
         <p:txBody>
-          <a:bodyPr wrap="square" rtlCol="0" anchor="b"/>
+          <a:bodyPr wrap="square" rtlCol="0" anchor="ctr"/>
           <a:lstStyle/>
           <a:p>
             <a:pPr indent="0" marL="0">
@@ -4490,7 +5043,7 @@
                 <a:ea typeface="Consolas" pitchFamily="34" charset="-122"/>
                 <a:cs typeface="Consolas" pitchFamily="34" charset="-120"/>
               </a:rPr>
-              <a:t>Individueel:  p = q + 10</a:t>
+              <a:t>Individueel:  p = q + 10   →   Draai om: q = p − 10</a:t>
             </a:r>
             <a:endParaRPr lang="en-US" sz="1600" dirty="0"/>
           </a:p>
@@ -4504,8 +5057,8 @@
         </p:nvSpPr>
         <p:spPr>
           <a:xfrm>
-            <a:off x="1097280" y="1508760"/>
-            <a:ext cx="6949440" cy="274320"/>
+            <a:off x="1143000" y="1828800"/>
+            <a:ext cx="6858000" cy="274320"/>
           </a:xfrm>
           <a:prstGeom prst="rect">
             <a:avLst/>
@@ -4517,50 +5070,11 @@
           <a:bodyPr wrap="square" rtlCol="0" anchor="ctr"/>
           <a:lstStyle/>
           <a:p>
-            <a:pPr indent="0" marL="0">
-              <a:buNone/>
-            </a:pPr>
-            <a:r>
-              <a:rPr lang="en-US" sz="1300" dirty="0">
-                <a:solidFill>
-                  <a:srgbClr val="718096"/>
-                </a:solidFill>
-                <a:latin typeface="Arial" pitchFamily="34" charset="0"/>
-                <a:ea typeface="Arial" pitchFamily="34" charset="-122"/>
-                <a:cs typeface="Arial" pitchFamily="34" charset="-120"/>
-              </a:rPr>
-              <a:t>Draai om: q = p − 10</a:t>
-            </a:r>
-            <a:endParaRPr lang="en-US" sz="1300" dirty="0"/>
-          </a:p>
-        </p:txBody>
-      </p:sp>
-      <p:sp>
-        <p:nvSpPr>
-          <p:cNvPr id="6" name="Text 4"/>
-          <p:cNvSpPr/>
-          <p:nvPr/>
-        </p:nvSpPr>
-        <p:spPr>
-          <a:xfrm>
-            <a:off x="914400" y="1828800"/>
-            <a:ext cx="7315200" cy="320040"/>
-          </a:xfrm>
-          <a:prstGeom prst="rect">
-            <a:avLst/>
-          </a:prstGeom>
-          <a:noFill/>
-          <a:ln/>
-        </p:spPr>
-        <p:txBody>
-          <a:bodyPr wrap="square" rtlCol="0" anchor="ctr"/>
-          <a:lstStyle/>
-          <a:p>
             <a:pPr algn="ctr" indent="0" marL="0">
               <a:buNone/>
             </a:pPr>
             <a:r>
-              <a:rPr lang="en-US" sz="1600" b="1" dirty="0">
+              <a:rPr lang="en-US" sz="1800" b="1" dirty="0">
                 <a:solidFill>
                   <a:srgbClr val="1A5276"/>
                 </a:solidFill>
@@ -4570,35 +5084,30 @@
               </a:rPr>
               <a:t>↓</a:t>
             </a:r>
-            <a:endParaRPr lang="en-US" sz="1600" dirty="0"/>
-          </a:p>
-        </p:txBody>
-      </p:sp>
-      <p:sp>
-        <p:nvSpPr>
-          <p:cNvPr id="7" name="Shape 5"/>
-          <p:cNvSpPr/>
-          <p:nvPr/>
-        </p:nvSpPr>
-        <p:spPr>
-          <a:xfrm>
-            <a:off x="914400" y="2194560"/>
-            <a:ext cx="7315200" cy="731520"/>
+            <a:endParaRPr lang="en-US" sz="1800" dirty="0"/>
+          </a:p>
+        </p:txBody>
+      </p:sp>
+      <p:sp>
+        <p:nvSpPr>
+          <p:cNvPr id="6" name="Shape 4"/>
+          <p:cNvSpPr/>
+          <p:nvPr/>
+        </p:nvSpPr>
+        <p:spPr>
+          <a:xfrm>
+            <a:off x="1143000" y="2103120"/>
+            <a:ext cx="6858000" cy="640080"/>
           </a:xfrm>
           <a:prstGeom prst="rect">
             <a:avLst>
-              <a:gd name="adj" fmla="val 6250"/>
+              <a:gd name="adj" fmla="val 7143"/>
             </a:avLst>
           </a:prstGeom>
           <a:solidFill>
-            <a:srgbClr val="F9F6F1"/>
+            <a:srgbClr val="EBF5FB"/>
           </a:solidFill>
-          <a:ln w="12700">
-            <a:solidFill>
-              <a:srgbClr val="1A5276"/>
-            </a:solidFill>
-            <a:prstDash val="solid"/>
-          </a:ln>
+          <a:ln/>
           <a:effectLst>
             <a:outerShdw sx="100000" sy="100000" kx="0" ky="0" algn="bl" rotWithShape="0" blurRad="76200" dist="25400" dir="8100000">
               <a:srgbClr val="000000">
@@ -4610,14 +5119,14 @@
       </p:sp>
       <p:sp>
         <p:nvSpPr>
-          <p:cNvPr id="8" name="Text 6"/>
-          <p:cNvSpPr/>
-          <p:nvPr/>
-        </p:nvSpPr>
-        <p:spPr>
-          <a:xfrm>
-            <a:off x="1097280" y="2194560"/>
-            <a:ext cx="6949440" cy="731520"/>
+          <p:cNvPr id="7" name="Text 5"/>
+          <p:cNvSpPr/>
+          <p:nvPr/>
+        </p:nvSpPr>
+        <p:spPr>
+          <a:xfrm>
+            <a:off x="1417320" y="2103120"/>
+            <a:ext cx="6309360" cy="640080"/>
           </a:xfrm>
           <a:prstGeom prst="rect">
             <a:avLst/>
@@ -4649,14 +5158,14 @@
       </p:sp>
       <p:sp>
         <p:nvSpPr>
-          <p:cNvPr id="9" name="Text 7"/>
-          <p:cNvSpPr/>
-          <p:nvPr/>
-        </p:nvSpPr>
-        <p:spPr>
-          <a:xfrm>
-            <a:off x="914400" y="2926080"/>
-            <a:ext cx="7315200" cy="320040"/>
+          <p:cNvPr id="8" name="Text 6"/>
+          <p:cNvSpPr/>
+          <p:nvPr/>
+        </p:nvSpPr>
+        <p:spPr>
+          <a:xfrm>
+            <a:off x="1143000" y="2743200"/>
+            <a:ext cx="6858000" cy="274320"/>
           </a:xfrm>
           <a:prstGeom prst="rect">
             <a:avLst/>
@@ -4672,7 +5181,7 @@
               <a:buNone/>
             </a:pPr>
             <a:r>
-              <a:rPr lang="en-US" sz="1600" b="1" dirty="0">
+              <a:rPr lang="en-US" sz="1800" b="1" dirty="0">
                 <a:solidFill>
                   <a:srgbClr val="1A5276"/>
                 </a:solidFill>
@@ -4682,35 +5191,30 @@
               </a:rPr>
               <a:t>↓</a:t>
             </a:r>
-            <a:endParaRPr lang="en-US" sz="1600" dirty="0"/>
-          </a:p>
-        </p:txBody>
-      </p:sp>
-      <p:sp>
-        <p:nvSpPr>
-          <p:cNvPr id="10" name="Shape 8"/>
-          <p:cNvSpPr/>
-          <p:nvPr/>
-        </p:nvSpPr>
-        <p:spPr>
-          <a:xfrm>
-            <a:off x="914400" y="3291840"/>
-            <a:ext cx="7315200" cy="731520"/>
+            <a:endParaRPr lang="en-US" sz="1800" dirty="0"/>
+          </a:p>
+        </p:txBody>
+      </p:sp>
+      <p:sp>
+        <p:nvSpPr>
+          <p:cNvPr id="9" name="Shape 7"/>
+          <p:cNvSpPr/>
+          <p:nvPr/>
+        </p:nvSpPr>
+        <p:spPr>
+          <a:xfrm>
+            <a:off x="1143000" y="3017520"/>
+            <a:ext cx="6858000" cy="640080"/>
           </a:xfrm>
           <a:prstGeom prst="rect">
             <a:avLst>
-              <a:gd name="adj" fmla="val 6250"/>
+              <a:gd name="adj" fmla="val 7143"/>
             </a:avLst>
           </a:prstGeom>
           <a:solidFill>
             <a:srgbClr val="1A5276"/>
           </a:solidFill>
-          <a:ln w="12700">
-            <a:solidFill>
-              <a:srgbClr val="1A5276"/>
-            </a:solidFill>
-            <a:prstDash val="solid"/>
-          </a:ln>
+          <a:ln/>
           <a:effectLst>
             <a:outerShdw sx="100000" sy="100000" kx="0" ky="0" algn="bl" rotWithShape="0" blurRad="76200" dist="25400" dir="8100000">
               <a:srgbClr val="000000">
@@ -4722,14 +5226,14 @@
       </p:sp>
       <p:sp>
         <p:nvSpPr>
-          <p:cNvPr id="11" name="Text 9"/>
-          <p:cNvSpPr/>
-          <p:nvPr/>
-        </p:nvSpPr>
-        <p:spPr>
-          <a:xfrm>
-            <a:off x="1097280" y="3291840"/>
-            <a:ext cx="6949440" cy="731520"/>
+          <p:cNvPr id="10" name="Text 8"/>
+          <p:cNvSpPr/>
+          <p:nvPr/>
+        </p:nvSpPr>
+        <p:spPr>
+          <a:xfrm>
+            <a:off x="1417320" y="3017520"/>
+            <a:ext cx="6309360" cy="640080"/>
           </a:xfrm>
           <a:prstGeom prst="rect">
             <a:avLst/>
@@ -4831,8 +5335,8 @@
         </p:nvSpPr>
         <p:spPr>
           <a:xfrm>
-            <a:off x="640080" y="914400"/>
-            <a:ext cx="7863840" cy="594360"/>
+            <a:off x="914400" y="960120"/>
+            <a:ext cx="7315200" cy="2697480"/>
           </a:xfrm>
           <a:prstGeom prst="rect">
             <a:avLst/>
@@ -4850,14 +5354,34 @@
       </p:sp>
       <p:sp>
         <p:nvSpPr>
-          <p:cNvPr id="4" name="Text 2"/>
-          <p:cNvSpPr/>
-          <p:nvPr/>
-        </p:nvSpPr>
-        <p:spPr>
-          <a:xfrm>
-            <a:off x="868680" y="914400"/>
-            <a:ext cx="1828800" cy="594360"/>
+          <p:cNvPr id="4" name="Shape 2"/>
+          <p:cNvSpPr/>
+          <p:nvPr/>
+        </p:nvSpPr>
+        <p:spPr>
+          <a:xfrm>
+            <a:off x="914400" y="960120"/>
+            <a:ext cx="54864" cy="2697480"/>
+          </a:xfrm>
+          <a:prstGeom prst="rect">
+            <a:avLst/>
+          </a:prstGeom>
+          <a:solidFill>
+            <a:srgbClr val="1A5276"/>
+          </a:solidFill>
+          <a:ln/>
+        </p:spPr>
+      </p:sp>
+      <p:sp>
+        <p:nvSpPr>
+          <p:cNvPr id="5" name="Text 3"/>
+          <p:cNvSpPr/>
+          <p:nvPr/>
+        </p:nvSpPr>
+        <p:spPr>
+          <a:xfrm>
+            <a:off x="1143000" y="1051560"/>
+            <a:ext cx="6858000" cy="502920"/>
           </a:xfrm>
           <a:prstGeom prst="rect">
             <a:avLst/>
@@ -4881,33 +5405,8 @@
                 <a:ea typeface="Arial" pitchFamily="34" charset="-122"/>
                 <a:cs typeface="Arial" pitchFamily="34" charset="-120"/>
               </a:rPr>
-              <a:t>Stel</a:t>
-            </a:r>
-            <a:endParaRPr lang="en-US" sz="1400" dirty="0"/>
-          </a:p>
-        </p:txBody>
-      </p:sp>
-      <p:sp>
-        <p:nvSpPr>
-          <p:cNvPr id="5" name="Text 3"/>
-          <p:cNvSpPr/>
-          <p:nvPr/>
-        </p:nvSpPr>
-        <p:spPr>
-          <a:xfrm>
-            <a:off x="2743200" y="914400"/>
-            <a:ext cx="5486400" cy="594360"/>
-          </a:xfrm>
-          <a:prstGeom prst="rect">
-            <a:avLst/>
-          </a:prstGeom>
-          <a:noFill/>
-          <a:ln/>
-        </p:spPr>
-        <p:txBody>
-          <a:bodyPr wrap="square" rtlCol="0" anchor="ctr"/>
-          <a:lstStyle/>
-          <a:p>
+              <a:t>Stel:  </a:t>
+            </a:r>
             <a:pPr indent="0" marL="0">
               <a:buNone/>
             </a:pPr>
@@ -4922,45 +5421,20 @@
               </a:rPr>
               <a:t>Qv = Qa  (vraag = aanbod)</a:t>
             </a:r>
-            <a:endParaRPr lang="en-US" sz="1600" dirty="0"/>
-          </a:p>
-        </p:txBody>
-      </p:sp>
-      <p:sp>
-        <p:nvSpPr>
-          <p:cNvPr id="6" name="Shape 4"/>
-          <p:cNvSpPr/>
-          <p:nvPr/>
-        </p:nvSpPr>
-        <p:spPr>
-          <a:xfrm>
-            <a:off x="640080" y="1664208"/>
-            <a:ext cx="7863840" cy="594360"/>
-          </a:xfrm>
-          <a:prstGeom prst="rect">
-            <a:avLst/>
-          </a:prstGeom>
-          <a:solidFill>
-            <a:srgbClr val="F7F8FA"/>
-          </a:solidFill>
-          <a:ln w="6350">
-            <a:solidFill>
-              <a:srgbClr val="CBD5E0"/>
-            </a:solidFill>
-            <a:prstDash val="solid"/>
-          </a:ln>
-        </p:spPr>
-      </p:sp>
-      <p:sp>
-        <p:nvSpPr>
-          <p:cNvPr id="7" name="Text 5"/>
-          <p:cNvSpPr/>
-          <p:nvPr/>
-        </p:nvSpPr>
-        <p:spPr>
-          <a:xfrm>
-            <a:off x="868680" y="1664208"/>
-            <a:ext cx="1828800" cy="594360"/>
+            <a:endParaRPr lang="en-US" sz="1400" dirty="0"/>
+          </a:p>
+        </p:txBody>
+      </p:sp>
+      <p:sp>
+        <p:nvSpPr>
+          <p:cNvPr id="6" name="Text 4"/>
+          <p:cNvSpPr/>
+          <p:nvPr/>
+        </p:nvSpPr>
+        <p:spPr>
+          <a:xfrm>
+            <a:off x="1143000" y="1554480"/>
+            <a:ext cx="6858000" cy="502920"/>
           </a:xfrm>
           <a:prstGeom prst="rect">
             <a:avLst/>
@@ -4984,33 +5458,8 @@
                 <a:ea typeface="Arial" pitchFamily="34" charset="-122"/>
                 <a:cs typeface="Arial" pitchFamily="34" charset="-120"/>
               </a:rPr>
-              <a:t>Invullen</a:t>
-            </a:r>
-            <a:endParaRPr lang="en-US" sz="1400" dirty="0"/>
-          </a:p>
-        </p:txBody>
-      </p:sp>
-      <p:sp>
-        <p:nvSpPr>
-          <p:cNvPr id="8" name="Text 6"/>
-          <p:cNvSpPr/>
-          <p:nvPr/>
-        </p:nvSpPr>
-        <p:spPr>
-          <a:xfrm>
-            <a:off x="2743200" y="1664208"/>
-            <a:ext cx="5486400" cy="594360"/>
-          </a:xfrm>
-          <a:prstGeom prst="rect">
-            <a:avLst/>
-          </a:prstGeom>
-          <a:noFill/>
-          <a:ln/>
-        </p:spPr>
-        <p:txBody>
-          <a:bodyPr wrap="square" rtlCol="0" anchor="ctr"/>
-          <a:lstStyle/>
-          <a:p>
+              <a:t>Invullen:  </a:t>
+            </a:r>
             <a:pPr indent="0" marL="0">
               <a:buNone/>
             </a:pPr>
@@ -5025,45 +5474,20 @@
               </a:rPr>
               <a:t>−10p + 500 = 10p − 100</a:t>
             </a:r>
-            <a:endParaRPr lang="en-US" sz="1600" dirty="0"/>
-          </a:p>
-        </p:txBody>
-      </p:sp>
-      <p:sp>
-        <p:nvSpPr>
-          <p:cNvPr id="9" name="Shape 7"/>
-          <p:cNvSpPr/>
-          <p:nvPr/>
-        </p:nvSpPr>
-        <p:spPr>
-          <a:xfrm>
-            <a:off x="640080" y="2414016"/>
-            <a:ext cx="7863840" cy="594360"/>
-          </a:xfrm>
-          <a:prstGeom prst="rect">
-            <a:avLst/>
-          </a:prstGeom>
-          <a:solidFill>
-            <a:srgbClr val="F7F8FA"/>
-          </a:solidFill>
-          <a:ln w="6350">
-            <a:solidFill>
-              <a:srgbClr val="CBD5E0"/>
-            </a:solidFill>
-            <a:prstDash val="solid"/>
-          </a:ln>
-        </p:spPr>
-      </p:sp>
-      <p:sp>
-        <p:nvSpPr>
-          <p:cNvPr id="10" name="Text 8"/>
-          <p:cNvSpPr/>
-          <p:nvPr/>
-        </p:nvSpPr>
-        <p:spPr>
-          <a:xfrm>
-            <a:off x="868680" y="2414016"/>
-            <a:ext cx="1828800" cy="594360"/>
+            <a:endParaRPr lang="en-US" sz="1400" dirty="0"/>
+          </a:p>
+        </p:txBody>
+      </p:sp>
+      <p:sp>
+        <p:nvSpPr>
+          <p:cNvPr id="7" name="Text 5"/>
+          <p:cNvSpPr/>
+          <p:nvPr/>
+        </p:nvSpPr>
+        <p:spPr>
+          <a:xfrm>
+            <a:off x="1143000" y="2057400"/>
+            <a:ext cx="6858000" cy="502920"/>
           </a:xfrm>
           <a:prstGeom prst="rect">
             <a:avLst/>
@@ -5087,33 +5511,8 @@
                 <a:ea typeface="Arial" pitchFamily="34" charset="-122"/>
                 <a:cs typeface="Arial" pitchFamily="34" charset="-120"/>
               </a:rPr>
-              <a:t>Oplossen</a:t>
-            </a:r>
-            <a:endParaRPr lang="en-US" sz="1400" dirty="0"/>
-          </a:p>
-        </p:txBody>
-      </p:sp>
-      <p:sp>
-        <p:nvSpPr>
-          <p:cNvPr id="11" name="Text 9"/>
-          <p:cNvSpPr/>
-          <p:nvPr/>
-        </p:nvSpPr>
-        <p:spPr>
-          <a:xfrm>
-            <a:off x="2743200" y="2414016"/>
-            <a:ext cx="5486400" cy="594360"/>
-          </a:xfrm>
-          <a:prstGeom prst="rect">
-            <a:avLst/>
-          </a:prstGeom>
-          <a:noFill/>
-          <a:ln/>
-        </p:spPr>
-        <p:txBody>
-          <a:bodyPr wrap="square" rtlCol="0" anchor="ctr"/>
-          <a:lstStyle/>
-          <a:p>
+              <a:t>Oplossen:  </a:t>
+            </a:r>
             <a:pPr indent="0" marL="0">
               <a:buNone/>
             </a:pPr>
@@ -5128,65 +5527,20 @@
               </a:rPr>
               <a:t>20p = 600</a:t>
             </a:r>
-            <a:endParaRPr lang="en-US" sz="1600" dirty="0"/>
-          </a:p>
-        </p:txBody>
-      </p:sp>
-      <p:sp>
-        <p:nvSpPr>
-          <p:cNvPr id="12" name="Shape 10"/>
-          <p:cNvSpPr/>
-          <p:nvPr/>
-        </p:nvSpPr>
-        <p:spPr>
-          <a:xfrm>
-            <a:off x="640080" y="3163824"/>
-            <a:ext cx="7863840" cy="594360"/>
-          </a:xfrm>
-          <a:prstGeom prst="rect">
-            <a:avLst/>
-          </a:prstGeom>
-          <a:solidFill>
-            <a:srgbClr val="EBF5FB"/>
-          </a:solidFill>
-          <a:ln w="6350">
-            <a:solidFill>
-              <a:srgbClr val="1A5276"/>
-            </a:solidFill>
-            <a:prstDash val="solid"/>
-          </a:ln>
-        </p:spPr>
-      </p:sp>
-      <p:sp>
-        <p:nvSpPr>
-          <p:cNvPr id="13" name="Shape 11"/>
-          <p:cNvSpPr/>
-          <p:nvPr/>
-        </p:nvSpPr>
-        <p:spPr>
-          <a:xfrm>
-            <a:off x="640080" y="3163824"/>
-            <a:ext cx="54864" cy="594360"/>
-          </a:xfrm>
-          <a:prstGeom prst="rect">
-            <a:avLst/>
-          </a:prstGeom>
-          <a:solidFill>
-            <a:srgbClr val="1A5276"/>
-          </a:solidFill>
-          <a:ln/>
-        </p:spPr>
-      </p:sp>
-      <p:sp>
-        <p:nvSpPr>
-          <p:cNvPr id="14" name="Text 12"/>
-          <p:cNvSpPr/>
-          <p:nvPr/>
-        </p:nvSpPr>
-        <p:spPr>
-          <a:xfrm>
-            <a:off x="868680" y="3163824"/>
-            <a:ext cx="1828800" cy="594360"/>
+            <a:endParaRPr lang="en-US" sz="1400" dirty="0"/>
+          </a:p>
+        </p:txBody>
+      </p:sp>
+      <p:sp>
+        <p:nvSpPr>
+          <p:cNvPr id="8" name="Text 6"/>
+          <p:cNvSpPr/>
+          <p:nvPr/>
+        </p:nvSpPr>
+        <p:spPr>
+          <a:xfrm>
+            <a:off x="1143000" y="2560320"/>
+            <a:ext cx="6858000" cy="502920"/>
           </a:xfrm>
           <a:prstGeom prst="rect">
             <a:avLst/>
@@ -5204,44 +5558,19 @@
             <a:r>
               <a:rPr lang="en-US" sz="1400" b="1" dirty="0">
                 <a:solidFill>
-                  <a:srgbClr val="1A5276"/>
-                </a:solidFill>
-                <a:latin typeface="Arial" pitchFamily="34" charset="0"/>
-                <a:ea typeface="Arial" pitchFamily="34" charset="-122"/>
-                <a:cs typeface="Arial" pitchFamily="34" charset="-120"/>
-              </a:rPr>
-              <a:t>Prijs</a:t>
-            </a:r>
-            <a:endParaRPr lang="en-US" sz="1400" dirty="0"/>
-          </a:p>
-        </p:txBody>
-      </p:sp>
-      <p:sp>
-        <p:nvSpPr>
-          <p:cNvPr id="15" name="Text 13"/>
-          <p:cNvSpPr/>
-          <p:nvPr/>
-        </p:nvSpPr>
-        <p:spPr>
-          <a:xfrm>
-            <a:off x="2743200" y="3163824"/>
-            <a:ext cx="5486400" cy="594360"/>
-          </a:xfrm>
-          <a:prstGeom prst="rect">
-            <a:avLst/>
-          </a:prstGeom>
-          <a:noFill/>
-          <a:ln/>
-        </p:spPr>
-        <p:txBody>
-          <a:bodyPr wrap="square" rtlCol="0" anchor="ctr"/>
-          <a:lstStyle/>
-          <a:p>
+                  <a:srgbClr val="718096"/>
+                </a:solidFill>
+                <a:latin typeface="Arial" pitchFamily="34" charset="0"/>
+                <a:ea typeface="Arial" pitchFamily="34" charset="-122"/>
+                <a:cs typeface="Arial" pitchFamily="34" charset="-120"/>
+              </a:rPr>
+              <a:t>Prijs:  </a:t>
+            </a:r>
             <a:pPr indent="0" marL="0">
               <a:buNone/>
             </a:pPr>
             <a:r>
-              <a:rPr lang="en-US" sz="1600" b="1" dirty="0">
+              <a:rPr lang="en-US" sz="1600" dirty="0">
                 <a:solidFill>
                   <a:srgbClr val="2D3748"/>
                 </a:solidFill>
@@ -5251,65 +5580,20 @@
               </a:rPr>
               <a:t>p* = €30</a:t>
             </a:r>
-            <a:endParaRPr lang="en-US" sz="1600" dirty="0"/>
-          </a:p>
-        </p:txBody>
-      </p:sp>
-      <p:sp>
-        <p:nvSpPr>
-          <p:cNvPr id="16" name="Shape 14"/>
-          <p:cNvSpPr/>
-          <p:nvPr/>
-        </p:nvSpPr>
-        <p:spPr>
-          <a:xfrm>
-            <a:off x="640080" y="3913632"/>
-            <a:ext cx="7863840" cy="594360"/>
-          </a:xfrm>
-          <a:prstGeom prst="rect">
-            <a:avLst/>
-          </a:prstGeom>
-          <a:solidFill>
-            <a:srgbClr val="EBF5FB"/>
-          </a:solidFill>
-          <a:ln w="6350">
-            <a:solidFill>
-              <a:srgbClr val="1A5276"/>
-            </a:solidFill>
-            <a:prstDash val="solid"/>
-          </a:ln>
-        </p:spPr>
-      </p:sp>
-      <p:sp>
-        <p:nvSpPr>
-          <p:cNvPr id="17" name="Shape 15"/>
-          <p:cNvSpPr/>
-          <p:nvPr/>
-        </p:nvSpPr>
-        <p:spPr>
-          <a:xfrm>
-            <a:off x="640080" y="3913632"/>
-            <a:ext cx="54864" cy="594360"/>
-          </a:xfrm>
-          <a:prstGeom prst="rect">
-            <a:avLst/>
-          </a:prstGeom>
-          <a:solidFill>
-            <a:srgbClr val="1A5276"/>
-          </a:solidFill>
-          <a:ln/>
-        </p:spPr>
-      </p:sp>
-      <p:sp>
-        <p:nvSpPr>
-          <p:cNvPr id="18" name="Text 16"/>
-          <p:cNvSpPr/>
-          <p:nvPr/>
-        </p:nvSpPr>
-        <p:spPr>
-          <a:xfrm>
-            <a:off x="868680" y="3913632"/>
-            <a:ext cx="1828800" cy="594360"/>
+            <a:endParaRPr lang="en-US" sz="1400" dirty="0"/>
+          </a:p>
+        </p:txBody>
+      </p:sp>
+      <p:sp>
+        <p:nvSpPr>
+          <p:cNvPr id="9" name="Text 7"/>
+          <p:cNvSpPr/>
+          <p:nvPr/>
+        </p:nvSpPr>
+        <p:spPr>
+          <a:xfrm>
+            <a:off x="1143000" y="3063240"/>
+            <a:ext cx="6858000" cy="502920"/>
           </a:xfrm>
           <a:prstGeom prst="rect">
             <a:avLst/>
@@ -5327,44 +5611,19 @@
             <a:r>
               <a:rPr lang="en-US" sz="1400" b="1" dirty="0">
                 <a:solidFill>
-                  <a:srgbClr val="1A5276"/>
-                </a:solidFill>
-                <a:latin typeface="Arial" pitchFamily="34" charset="0"/>
-                <a:ea typeface="Arial" pitchFamily="34" charset="-122"/>
-                <a:cs typeface="Arial" pitchFamily="34" charset="-120"/>
-              </a:rPr>
-              <a:t>Hoeveelheid</a:t>
-            </a:r>
-            <a:endParaRPr lang="en-US" sz="1400" dirty="0"/>
-          </a:p>
-        </p:txBody>
-      </p:sp>
-      <p:sp>
-        <p:nvSpPr>
-          <p:cNvPr id="19" name="Text 17"/>
-          <p:cNvSpPr/>
-          <p:nvPr/>
-        </p:nvSpPr>
-        <p:spPr>
-          <a:xfrm>
-            <a:off x="2743200" y="3913632"/>
-            <a:ext cx="5486400" cy="594360"/>
-          </a:xfrm>
-          <a:prstGeom prst="rect">
-            <a:avLst/>
-          </a:prstGeom>
-          <a:noFill/>
-          <a:ln/>
-        </p:spPr>
-        <p:txBody>
-          <a:bodyPr wrap="square" rtlCol="0" anchor="ctr"/>
-          <a:lstStyle/>
-          <a:p>
+                  <a:srgbClr val="718096"/>
+                </a:solidFill>
+                <a:latin typeface="Arial" pitchFamily="34" charset="0"/>
+                <a:ea typeface="Arial" pitchFamily="34" charset="-122"/>
+                <a:cs typeface="Arial" pitchFamily="34" charset="-120"/>
+              </a:rPr>
+              <a:t>Hoeveelheid:  </a:t>
+            </a:r>
             <a:pPr indent="0" marL="0">
               <a:buNone/>
             </a:pPr>
             <a:r>
-              <a:rPr lang="en-US" sz="1600" b="1" dirty="0">
+              <a:rPr lang="en-US" sz="1600" dirty="0">
                 <a:solidFill>
                   <a:srgbClr val="2D3748"/>
                 </a:solidFill>
@@ -5374,7 +5633,7 @@
               </a:rPr>
               <a:t>Q* = 10 × 30 − 100 = 200</a:t>
             </a:r>
-            <a:endParaRPr lang="en-US" sz="1600" dirty="0"/>
+            <a:endParaRPr lang="en-US" sz="1400" dirty="0"/>
           </a:p>
         </p:txBody>
       </p:sp>
@@ -5451,15 +5710,15 @@
         <p:spPr>
           <a:xfrm>
             <a:off x="457200" y="1005840"/>
-            <a:ext cx="3931920" cy="3200400"/>
+            <a:ext cx="4206240" cy="2926080"/>
           </a:xfrm>
           <a:prstGeom prst="rect">
             <a:avLst>
-              <a:gd name="adj" fmla="val 1429"/>
+              <a:gd name="adj" fmla="val 1563"/>
             </a:avLst>
           </a:prstGeom>
           <a:solidFill>
-            <a:srgbClr val="F9F6F1"/>
+            <a:srgbClr val="F7F8FA"/>
           </a:solidFill>
           <a:ln/>
           <a:effectLst>
@@ -5480,7 +5739,7 @@
         <p:spPr>
           <a:xfrm>
             <a:off x="457200" y="1005840"/>
-            <a:ext cx="54864" cy="3200400"/>
+            <a:ext cx="54864" cy="2926080"/>
           </a:xfrm>
           <a:prstGeom prst="rect">
             <a:avLst/>
@@ -5500,7 +5759,7 @@
         <p:spPr>
           <a:xfrm>
             <a:off x="640080" y="1143000"/>
-            <a:ext cx="3611880" cy="365760"/>
+            <a:ext cx="3886200" cy="365760"/>
           </a:xfrm>
           <a:prstGeom prst="rect">
             <a:avLst/>
@@ -5538,8 +5797,8 @@
         </p:nvSpPr>
         <p:spPr>
           <a:xfrm>
-            <a:off x="640080" y="1554480"/>
-            <a:ext cx="3611880" cy="2514600"/>
+            <a:off x="822960" y="1554480"/>
+            <a:ext cx="3657600" cy="457200"/>
           </a:xfrm>
           <a:prstGeom prst="rect">
             <a:avLst/>
@@ -5548,13 +5807,10 @@
           <a:ln/>
         </p:spPr>
         <p:txBody>
-          <a:bodyPr wrap="square" rtlCol="0" anchor="t"/>
-          <a:lstStyle/>
-          <a:p>
-            <a:pPr algn="l" indent="0" marL="0">
-              <a:lnSpc>
-                <a:spcPct val="115000"/>
-              </a:lnSpc>
+          <a:bodyPr wrap="square" rtlCol="0" anchor="ctr"/>
+          <a:lstStyle/>
+          <a:p>
+            <a:pPr indent="0" marL="0">
               <a:buNone/>
             </a:pPr>
             <a:r>
@@ -5566,13 +5822,34 @@
                 <a:ea typeface="Consolas" pitchFamily="34" charset="-122"/>
                 <a:cs typeface="Consolas" pitchFamily="34" charset="-120"/>
               </a:rPr>
-              <a:t>q = p − 10 = 30 − 10 = 20
-</a:t>
-            </a:r>
-            <a:pPr algn="l" indent="0" marL="0">
-              <a:lnSpc>
-                <a:spcPct val="115000"/>
-              </a:lnSpc>
+              <a:t>q = p − 10 = 30 − 10 = 20</a:t>
+            </a:r>
+            <a:endParaRPr lang="en-US" sz="1400" dirty="0"/>
+          </a:p>
+        </p:txBody>
+      </p:sp>
+      <p:sp>
+        <p:nvSpPr>
+          <p:cNvPr id="7" name="Text 5"/>
+          <p:cNvSpPr/>
+          <p:nvPr/>
+        </p:nvSpPr>
+        <p:spPr>
+          <a:xfrm>
+            <a:off x="822960" y="2057400"/>
+            <a:ext cx="3657600" cy="457200"/>
+          </a:xfrm>
+          <a:prstGeom prst="rect">
+            <a:avLst/>
+          </a:prstGeom>
+          <a:noFill/>
+          <a:ln/>
+        </p:spPr>
+        <p:txBody>
+          <a:bodyPr wrap="square" rtlCol="0" anchor="ctr"/>
+          <a:lstStyle/>
+          <a:p>
+            <a:pPr indent="0" marL="0">
               <a:buNone/>
             </a:pPr>
             <a:r>
@@ -5584,13 +5861,34 @@
                 <a:ea typeface="Consolas" pitchFamily="34" charset="-122"/>
                 <a:cs typeface="Consolas" pitchFamily="34" charset="-120"/>
               </a:rPr>
-              <a:t>TO = p × q = 30 × 20 = €600
-</a:t>
-            </a:r>
-            <a:pPr algn="l" indent="0" marL="0">
-              <a:lnSpc>
-                <a:spcPct val="115000"/>
-              </a:lnSpc>
+              <a:t>TO = p × q = 30 × 20 = €600</a:t>
+            </a:r>
+            <a:endParaRPr lang="en-US" sz="1400" dirty="0"/>
+          </a:p>
+        </p:txBody>
+      </p:sp>
+      <p:sp>
+        <p:nvSpPr>
+          <p:cNvPr id="8" name="Text 6"/>
+          <p:cNvSpPr/>
+          <p:nvPr/>
+        </p:nvSpPr>
+        <p:spPr>
+          <a:xfrm>
+            <a:off x="822960" y="2560320"/>
+            <a:ext cx="3657600" cy="457200"/>
+          </a:xfrm>
+          <a:prstGeom prst="rect">
+            <a:avLst/>
+          </a:prstGeom>
+          <a:noFill/>
+          <a:ln/>
+        </p:spPr>
+        <p:txBody>
+          <a:bodyPr wrap="square" rtlCol="0" anchor="ctr"/>
+          <a:lstStyle/>
+          <a:p>
+            <a:pPr indent="0" marL="0">
               <a:buNone/>
             </a:pPr>
             <a:r>
@@ -5602,19 +5900,40 @@
                 <a:ea typeface="Consolas" pitchFamily="34" charset="-122"/>
                 <a:cs typeface="Consolas" pitchFamily="34" charset="-120"/>
               </a:rPr>
-              <a:t>TK = 0,5(20)² + 10(20) + 128 = €528
-</a:t>
-            </a:r>
-            <a:pPr algn="l" indent="0" marL="0">
-              <a:lnSpc>
-                <a:spcPct val="115000"/>
-              </a:lnSpc>
-              <a:buNone/>
-            </a:pPr>
-            <a:r>
-              <a:rPr lang="en-US" sz="1400" b="1" dirty="0">
-                <a:solidFill>
-                  <a:srgbClr val="1A5276"/>
+              <a:t>TK = 0,5(20)² + 10(20) + 128 = €528</a:t>
+            </a:r>
+            <a:endParaRPr lang="en-US" sz="1400" dirty="0"/>
+          </a:p>
+        </p:txBody>
+      </p:sp>
+      <p:sp>
+        <p:nvSpPr>
+          <p:cNvPr id="9" name="Text 7"/>
+          <p:cNvSpPr/>
+          <p:nvPr/>
+        </p:nvSpPr>
+        <p:spPr>
+          <a:xfrm>
+            <a:off x="822960" y="3063240"/>
+            <a:ext cx="3657600" cy="457200"/>
+          </a:xfrm>
+          <a:prstGeom prst="rect">
+            <a:avLst/>
+          </a:prstGeom>
+          <a:noFill/>
+          <a:ln/>
+        </p:spPr>
+        <p:txBody>
+          <a:bodyPr wrap="square" rtlCol="0" anchor="ctr"/>
+          <a:lstStyle/>
+          <a:p>
+            <a:pPr indent="0" marL="0">
+              <a:buNone/>
+            </a:pPr>
+            <a:r>
+              <a:rPr lang="en-US" sz="1400" dirty="0">
+                <a:solidFill>
+                  <a:srgbClr val="2D3748"/>
                 </a:solidFill>
                 <a:latin typeface="Consolas" pitchFamily="34" charset="0"/>
                 <a:ea typeface="Consolas" pitchFamily="34" charset="-122"/>
@@ -5628,22 +5947,22 @@
       </p:sp>
       <p:sp>
         <p:nvSpPr>
-          <p:cNvPr id="7" name="Shape 5"/>
+          <p:cNvPr id="10" name="Shape 8"/>
           <p:cNvSpPr/>
           <p:nvPr/>
         </p:nvSpPr>
         <p:spPr>
           <a:xfrm>
             <a:off x="4754880" y="1005840"/>
-            <a:ext cx="3931920" cy="3200400"/>
+            <a:ext cx="3931920" cy="2926080"/>
           </a:xfrm>
           <a:prstGeom prst="rect">
             <a:avLst>
-              <a:gd name="adj" fmla="val 1429"/>
+              <a:gd name="adj" fmla="val 1563"/>
             </a:avLst>
           </a:prstGeom>
           <a:solidFill>
-            <a:srgbClr val="F7F8FA"/>
+            <a:srgbClr val="F9F6F1"/>
           </a:solidFill>
           <a:ln/>
           <a:effectLst>
@@ -5657,27 +5976,27 @@
       </p:sp>
       <p:sp>
         <p:nvSpPr>
-          <p:cNvPr id="8" name="Shape 6"/>
+          <p:cNvPr id="11" name="Shape 9"/>
           <p:cNvSpPr/>
           <p:nvPr/>
         </p:nvSpPr>
         <p:spPr>
           <a:xfrm>
             <a:off x="4754880" y="1005840"/>
-            <a:ext cx="54864" cy="3200400"/>
+            <a:ext cx="54864" cy="2926080"/>
           </a:xfrm>
           <a:prstGeom prst="rect">
             <a:avLst/>
           </a:prstGeom>
           <a:solidFill>
-            <a:srgbClr val="1A5276"/>
+            <a:srgbClr val="E67E22"/>
           </a:solidFill>
           <a:ln/>
         </p:spPr>
       </p:sp>
       <p:sp>
         <p:nvSpPr>
-          <p:cNvPr id="9" name="Text 7"/>
+          <p:cNvPr id="12" name="Text 10"/>
           <p:cNvSpPr/>
           <p:nvPr/>
         </p:nvSpPr>
@@ -5702,7 +6021,7 @@
             <a:r>
               <a:rPr lang="en-US" sz="2000" b="1" dirty="0">
                 <a:solidFill>
-                  <a:srgbClr val="154360"/>
+                  <a:srgbClr val="E67E22"/>
                 </a:solidFill>
                 <a:latin typeface="Arial" pitchFamily="34" charset="0"/>
                 <a:ea typeface="Arial" pitchFamily="34" charset="-122"/>
@@ -5716,14 +6035,14 @@
       </p:sp>
       <p:sp>
         <p:nvSpPr>
-          <p:cNvPr id="10" name="Text 8"/>
+          <p:cNvPr id="13" name="Text 11"/>
           <p:cNvSpPr/>
           <p:nvPr/>
         </p:nvSpPr>
         <p:spPr>
           <a:xfrm>
             <a:off x="4937760" y="1554480"/>
-            <a:ext cx="3611880" cy="2514600"/>
+            <a:ext cx="3611880" cy="2240280"/>
           </a:xfrm>
           <a:prstGeom prst="rect">
             <a:avLst/>
@@ -5868,344 +6187,36 @@
                 <a:ea typeface="Arial" pitchFamily="34" charset="-122"/>
                 <a:cs typeface="Arial" pitchFamily="34" charset="-120"/>
               </a:rPr>
-              <a:t>Surplus: CS en PS</a:t>
+              <a:t>Winst in de grafiek</a:t>
             </a:r>
             <a:endParaRPr lang="en-US" sz="2400" dirty="0"/>
           </a:p>
         </p:txBody>
       </p:sp>
-      <p:sp>
-        <p:nvSpPr>
-          <p:cNvPr id="3" name="Shape 1"/>
-          <p:cNvSpPr/>
-          <p:nvPr/>
-        </p:nvSpPr>
-        <p:spPr>
-          <a:xfrm>
-            <a:off x="457200" y="1005840"/>
-            <a:ext cx="3931920" cy="3017520"/>
-          </a:xfrm>
-          <a:prstGeom prst="rect">
-            <a:avLst>
-              <a:gd name="adj" fmla="val 1515"/>
-            </a:avLst>
-          </a:prstGeom>
-          <a:solidFill>
-            <a:srgbClr val="F9F6F1"/>
-          </a:solidFill>
-          <a:ln/>
-          <a:effectLst>
-            <a:outerShdw sx="100000" sy="100000" kx="0" ky="0" algn="bl" rotWithShape="0" blurRad="76200" dist="25400" dir="8100000">
-              <a:srgbClr val="000000">
-                <a:alpha val="10000"/>
-              </a:srgbClr>
-            </a:outerShdw>
-          </a:effectLst>
-        </p:spPr>
-      </p:sp>
-      <p:sp>
-        <p:nvSpPr>
-          <p:cNvPr id="4" name="Shape 2"/>
-          <p:cNvSpPr/>
-          <p:nvPr/>
-        </p:nvSpPr>
-        <p:spPr>
-          <a:xfrm>
-            <a:off x="457200" y="1005840"/>
-            <a:ext cx="54864" cy="3017520"/>
-          </a:xfrm>
-          <a:prstGeom prst="rect">
-            <a:avLst/>
-          </a:prstGeom>
-          <a:solidFill>
-            <a:srgbClr val="1A5276"/>
-          </a:solidFill>
-          <a:ln/>
-        </p:spPr>
-      </p:sp>
-      <p:sp>
-        <p:nvSpPr>
-          <p:cNvPr id="5" name="Text 3"/>
-          <p:cNvSpPr/>
-          <p:nvPr/>
-        </p:nvSpPr>
-        <p:spPr>
-          <a:xfrm>
-            <a:off x="640080" y="1143000"/>
-            <a:ext cx="3611880" cy="365760"/>
-          </a:xfrm>
-          <a:prstGeom prst="rect">
-            <a:avLst/>
-          </a:prstGeom>
-          <a:noFill/>
-          <a:ln/>
-        </p:spPr>
-        <p:txBody>
-          <a:bodyPr wrap="square" rtlCol="0" anchor="t"/>
-          <a:lstStyle/>
-          <a:p>
-            <a:pPr indent="0" marL="0">
-              <a:buNone/>
-            </a:pPr>
-            <a:r>
-              <a:rPr lang="en-US" sz="2000" b="1" dirty="0">
-                <a:solidFill>
-                  <a:srgbClr val="1A5276"/>
-                </a:solidFill>
-                <a:latin typeface="Arial" pitchFamily="34" charset="0"/>
-                <a:ea typeface="Arial" pitchFamily="34" charset="-122"/>
-                <a:cs typeface="Arial" pitchFamily="34" charset="-120"/>
-              </a:rPr>
-              <a:t>Consumentensurplus (CS)</a:t>
-            </a:r>
-            <a:endParaRPr lang="en-US" sz="2000" dirty="0"/>
-          </a:p>
-        </p:txBody>
-      </p:sp>
-      <p:sp>
-        <p:nvSpPr>
-          <p:cNvPr id="6" name="Text 4"/>
-          <p:cNvSpPr/>
-          <p:nvPr/>
-        </p:nvSpPr>
-        <p:spPr>
-          <a:xfrm>
-            <a:off x="640080" y="1554480"/>
-            <a:ext cx="3611880" cy="2331720"/>
-          </a:xfrm>
-          <a:prstGeom prst="rect">
-            <a:avLst/>
-          </a:prstGeom>
-          <a:noFill/>
-          <a:ln/>
-        </p:spPr>
-        <p:txBody>
-          <a:bodyPr wrap="square" rtlCol="0" anchor="t"/>
-          <a:lstStyle/>
-          <a:p>
-            <a:pPr algn="l" indent="0" marL="0">
-              <a:lnSpc>
-                <a:spcPct val="115000"/>
-              </a:lnSpc>
-              <a:buNone/>
-            </a:pPr>
-            <a:r>
-              <a:rPr lang="en-US" sz="1400" dirty="0">
-                <a:solidFill>
-                  <a:srgbClr val="2D3748"/>
-                </a:solidFill>
-                <a:latin typeface="Arial" pitchFamily="34" charset="0"/>
-                <a:ea typeface="Arial" pitchFamily="34" charset="-122"/>
-                <a:cs typeface="Arial" pitchFamily="34" charset="-120"/>
-              </a:rPr>
-              <a:t>Voordeel van de consument: betaalt minder dan bereid was.
-</a:t>
-            </a:r>
-            <a:pPr algn="l" indent="0" marL="0">
-              <a:lnSpc>
-                <a:spcPct val="115000"/>
-              </a:lnSpc>
-              <a:buNone/>
-            </a:pPr>
-            <a:r>
-              <a:rPr lang="en-US" sz="1300" i="1" dirty="0">
-                <a:solidFill>
-                  <a:srgbClr val="718096"/>
-                </a:solidFill>
-                <a:latin typeface="Arial" pitchFamily="34" charset="0"/>
-                <a:ea typeface="Arial" pitchFamily="34" charset="-122"/>
-                <a:cs typeface="Arial" pitchFamily="34" charset="-120"/>
-              </a:rPr>
-              <a:t>Driehoek boven p*, onder V
-</a:t>
-            </a:r>
-            <a:pPr algn="l" indent="0" marL="0">
-              <a:lnSpc>
-                <a:spcPct val="115000"/>
-              </a:lnSpc>
-              <a:buNone/>
-            </a:pPr>
-            <a:r>
-              <a:rPr lang="en-US" sz="1500" b="1" dirty="0">
-                <a:solidFill>
-                  <a:srgbClr val="1A5276"/>
-                </a:solidFill>
-                <a:latin typeface="Consolas" pitchFamily="34" charset="0"/>
-                <a:ea typeface="Consolas" pitchFamily="34" charset="-122"/>
-                <a:cs typeface="Consolas" pitchFamily="34" charset="-120"/>
-              </a:rPr>
-              <a:t>½ × 200 × (50 − 30) = €2.000</a:t>
-            </a:r>
-            <a:endParaRPr lang="en-US" sz="1400" dirty="0"/>
-          </a:p>
-        </p:txBody>
-      </p:sp>
-      <p:sp>
-        <p:nvSpPr>
-          <p:cNvPr id="7" name="Shape 5"/>
-          <p:cNvSpPr/>
-          <p:nvPr/>
-        </p:nvSpPr>
-        <p:spPr>
-          <a:xfrm>
-            <a:off x="4754880" y="1005840"/>
-            <a:ext cx="3931920" cy="3017520"/>
-          </a:xfrm>
-          <a:prstGeom prst="rect">
-            <a:avLst>
-              <a:gd name="adj" fmla="val 1515"/>
-            </a:avLst>
-          </a:prstGeom>
-          <a:solidFill>
-            <a:srgbClr val="F9F6F1"/>
-          </a:solidFill>
-          <a:ln/>
-          <a:effectLst>
-            <a:outerShdw sx="100000" sy="100000" kx="0" ky="0" algn="bl" rotWithShape="0" blurRad="76200" dist="25400" dir="8100000">
-              <a:srgbClr val="000000">
-                <a:alpha val="10000"/>
-              </a:srgbClr>
-            </a:outerShdw>
-          </a:effectLst>
-        </p:spPr>
-      </p:sp>
-      <p:sp>
-        <p:nvSpPr>
-          <p:cNvPr id="8" name="Shape 6"/>
-          <p:cNvSpPr/>
-          <p:nvPr/>
-        </p:nvSpPr>
-        <p:spPr>
-          <a:xfrm>
-            <a:off x="4754880" y="1005840"/>
-            <a:ext cx="54864" cy="3017520"/>
-          </a:xfrm>
-          <a:prstGeom prst="rect">
-            <a:avLst/>
-          </a:prstGeom>
-          <a:solidFill>
-            <a:srgbClr val="1E8449"/>
-          </a:solidFill>
-          <a:ln/>
-        </p:spPr>
-      </p:sp>
-      <p:sp>
-        <p:nvSpPr>
-          <p:cNvPr id="9" name="Text 7"/>
-          <p:cNvSpPr/>
-          <p:nvPr/>
-        </p:nvSpPr>
-        <p:spPr>
-          <a:xfrm>
-            <a:off x="4937760" y="1143000"/>
-            <a:ext cx="3611880" cy="365760"/>
-          </a:xfrm>
-          <a:prstGeom prst="rect">
-            <a:avLst/>
-          </a:prstGeom>
-          <a:noFill/>
-          <a:ln/>
-        </p:spPr>
-        <p:txBody>
-          <a:bodyPr wrap="square" rtlCol="0" anchor="t"/>
-          <a:lstStyle/>
-          <a:p>
-            <a:pPr indent="0" marL="0">
-              <a:buNone/>
-            </a:pPr>
-            <a:r>
-              <a:rPr lang="en-US" sz="2000" b="1" dirty="0">
-                <a:solidFill>
-                  <a:srgbClr val="1E8449"/>
-                </a:solidFill>
-                <a:latin typeface="Arial" pitchFamily="34" charset="0"/>
-                <a:ea typeface="Arial" pitchFamily="34" charset="-122"/>
-                <a:cs typeface="Arial" pitchFamily="34" charset="-120"/>
-              </a:rPr>
-              <a:t>Producentensurplus (PS)</a:t>
-            </a:r>
-            <a:endParaRPr lang="en-US" sz="2000" dirty="0"/>
-          </a:p>
-        </p:txBody>
-      </p:sp>
-      <p:sp>
-        <p:nvSpPr>
-          <p:cNvPr id="10" name="Text 8"/>
-          <p:cNvSpPr/>
-          <p:nvPr/>
-        </p:nvSpPr>
-        <p:spPr>
-          <a:xfrm>
-            <a:off x="4937760" y="1554480"/>
-            <a:ext cx="3611880" cy="2331720"/>
-          </a:xfrm>
-          <a:prstGeom prst="rect">
-            <a:avLst/>
-          </a:prstGeom>
-          <a:noFill/>
-          <a:ln/>
-        </p:spPr>
-        <p:txBody>
-          <a:bodyPr wrap="square" rtlCol="0" anchor="t"/>
-          <a:lstStyle/>
-          <a:p>
-            <a:pPr algn="l" indent="0" marL="0">
-              <a:lnSpc>
-                <a:spcPct val="115000"/>
-              </a:lnSpc>
-              <a:buNone/>
-            </a:pPr>
-            <a:r>
-              <a:rPr lang="en-US" sz="1400" dirty="0">
-                <a:solidFill>
-                  <a:srgbClr val="2D3748"/>
-                </a:solidFill>
-                <a:latin typeface="Arial" pitchFamily="34" charset="0"/>
-                <a:ea typeface="Arial" pitchFamily="34" charset="-122"/>
-                <a:cs typeface="Arial" pitchFamily="34" charset="-120"/>
-              </a:rPr>
-              <a:t>Voordeel van de producent: ontvangt meer dan minimale prijs.
-</a:t>
-            </a:r>
-            <a:pPr algn="l" indent="0" marL="0">
-              <a:lnSpc>
-                <a:spcPct val="115000"/>
-              </a:lnSpc>
-              <a:buNone/>
-            </a:pPr>
-            <a:r>
-              <a:rPr lang="en-US" sz="1300" i="1" dirty="0">
-                <a:solidFill>
-                  <a:srgbClr val="718096"/>
-                </a:solidFill>
-                <a:latin typeface="Arial" pitchFamily="34" charset="0"/>
-                <a:ea typeface="Arial" pitchFamily="34" charset="-122"/>
-                <a:cs typeface="Arial" pitchFamily="34" charset="-120"/>
-              </a:rPr>
-              <a:t>Driehoek onder p*, boven A
-</a:t>
-            </a:r>
-            <a:pPr algn="l" indent="0" marL="0">
-              <a:lnSpc>
-                <a:spcPct val="115000"/>
-              </a:lnSpc>
-              <a:buNone/>
-            </a:pPr>
-            <a:r>
-              <a:rPr lang="en-US" sz="1500" b="1" dirty="0">
-                <a:solidFill>
-                  <a:srgbClr val="1E8449"/>
-                </a:solidFill>
-                <a:latin typeface="Consolas" pitchFamily="34" charset="0"/>
-                <a:ea typeface="Consolas" pitchFamily="34" charset="-122"/>
-                <a:cs typeface="Consolas" pitchFamily="34" charset="-120"/>
-              </a:rPr>
-              <a:t>½ × 200 × (30 − 10) = €2.000</a:t>
-            </a:r>
-            <a:endParaRPr lang="en-US" sz="1400" dirty="0"/>
-          </a:p>
-        </p:txBody>
-      </p:sp>
+      <p:pic>
+        <p:nvPicPr>
+          <p:cNvPr id="3" name="Image 0" descr="preencoded.png">    </p:cNvPr>
+          <p:cNvPicPr>
+            <a:picLocks noChangeAspect="1"/>
+          </p:cNvPicPr>
+          <p:nvPr/>
+        </p:nvPicPr>
+        <p:blipFill>
+          <a:blip r:embed="rId1"/>
+          <a:stretch>
+            <a:fillRect/>
+          </a:stretch>
+        </p:blipFill>
+        <p:spPr>
+          <a:xfrm>
+            <a:off x="685800" y="822960"/>
+            <a:ext cx="7772400" cy="3886200"/>
+          </a:xfrm>
+          <a:prstGeom prst="rect">
+            <a:avLst/>
+          </a:prstGeom>
+        </p:spPr>
+      </p:pic>
     </p:spTree>
   </p:cSld>
   <p:clrMapOvr>
@@ -6264,7 +6275,7 @@
                 <a:ea typeface="Arial" pitchFamily="34" charset="-122"/>
                 <a:cs typeface="Arial" pitchFamily="34" charset="-120"/>
               </a:rPr>
-              <a:t>Lange termijn: winst verdwijnt</a:t>
+              <a:t>Surplus: CS en PS</a:t>
             </a:r>
             <a:endParaRPr lang="en-US" sz="2400" dirty="0"/>
           </a:p>
@@ -6278,23 +6289,18 @@
         </p:nvSpPr>
         <p:spPr>
           <a:xfrm>
-            <a:off x="1371600" y="1097280"/>
-            <a:ext cx="6400800" cy="594360"/>
+            <a:off x="457200" y="1005840"/>
+            <a:ext cx="3931920" cy="3017520"/>
           </a:xfrm>
           <a:prstGeom prst="rect">
             <a:avLst>
-              <a:gd name="adj" fmla="val 7692"/>
+              <a:gd name="adj" fmla="val 1515"/>
             </a:avLst>
           </a:prstGeom>
           <a:solidFill>
             <a:srgbClr val="F9F6F1"/>
           </a:solidFill>
-          <a:ln w="12700">
-            <a:solidFill>
-              <a:srgbClr val="1A5276"/>
-            </a:solidFill>
-            <a:prstDash val="solid"/>
-          </a:ln>
+          <a:ln/>
           <a:effectLst>
             <a:outerShdw sx="100000" sy="100000" kx="0" ky="0" algn="bl" rotWithShape="0" blurRad="76200" dist="25400" dir="8100000">
               <a:srgbClr val="000000">
@@ -6306,14 +6312,34 @@
       </p:sp>
       <p:sp>
         <p:nvSpPr>
-          <p:cNvPr id="4" name="Text 2"/>
-          <p:cNvSpPr/>
-          <p:nvPr/>
-        </p:nvSpPr>
-        <p:spPr>
-          <a:xfrm>
-            <a:off x="1554480" y="1097280"/>
-            <a:ext cx="6035040" cy="594360"/>
+          <p:cNvPr id="4" name="Shape 2"/>
+          <p:cNvSpPr/>
+          <p:nvPr/>
+        </p:nvSpPr>
+        <p:spPr>
+          <a:xfrm>
+            <a:off x="457200" y="1005840"/>
+            <a:ext cx="54864" cy="3017520"/>
+          </a:xfrm>
+          <a:prstGeom prst="rect">
+            <a:avLst/>
+          </a:prstGeom>
+          <a:solidFill>
+            <a:srgbClr val="1A5276"/>
+          </a:solidFill>
+          <a:ln/>
+        </p:spPr>
+      </p:sp>
+      <p:sp>
+        <p:nvSpPr>
+          <p:cNvPr id="5" name="Text 3"/>
+          <p:cNvSpPr/>
+          <p:nvPr/>
+        </p:nvSpPr>
+        <p:spPr>
+          <a:xfrm>
+            <a:off x="640080" y="1143000"/>
+            <a:ext cx="3611880" cy="365760"/>
           </a:xfrm>
           <a:prstGeom prst="rect">
             <a:avLst/>
@@ -6322,14 +6348,56 @@
           <a:ln/>
         </p:spPr>
         <p:txBody>
-          <a:bodyPr wrap="square" rtlCol="0" anchor="ctr"/>
+          <a:bodyPr wrap="square" rtlCol="0" anchor="t"/>
           <a:lstStyle/>
           <a:p>
             <a:pPr indent="0" marL="0">
               <a:buNone/>
             </a:pPr>
             <a:r>
-              <a:rPr lang="en-US" sz="1700" dirty="0">
+              <a:rPr lang="en-US" sz="2000" b="1" dirty="0">
+                <a:solidFill>
+                  <a:srgbClr val="1A5276"/>
+                </a:solidFill>
+                <a:latin typeface="Arial" pitchFamily="34" charset="0"/>
+                <a:ea typeface="Arial" pitchFamily="34" charset="-122"/>
+                <a:cs typeface="Arial" pitchFamily="34" charset="-120"/>
+              </a:rPr>
+              <a:t>Consumentensurplus (CS)</a:t>
+            </a:r>
+            <a:endParaRPr lang="en-US" sz="2000" dirty="0"/>
+          </a:p>
+        </p:txBody>
+      </p:sp>
+      <p:sp>
+        <p:nvSpPr>
+          <p:cNvPr id="6" name="Text 4"/>
+          <p:cNvSpPr/>
+          <p:nvPr/>
+        </p:nvSpPr>
+        <p:spPr>
+          <a:xfrm>
+            <a:off x="640080" y="1554480"/>
+            <a:ext cx="3611880" cy="2331720"/>
+          </a:xfrm>
+          <a:prstGeom prst="rect">
+            <a:avLst/>
+          </a:prstGeom>
+          <a:noFill/>
+          <a:ln/>
+        </p:spPr>
+        <p:txBody>
+          <a:bodyPr wrap="square" rtlCol="0" anchor="t"/>
+          <a:lstStyle/>
+          <a:p>
+            <a:pPr algn="l" indent="0" marL="0">
+              <a:lnSpc>
+                <a:spcPct val="115000"/>
+              </a:lnSpc>
+              <a:buNone/>
+            </a:pPr>
+            <a:r>
+              <a:rPr lang="en-US" sz="1400" dirty="0">
                 <a:solidFill>
                   <a:srgbClr val="2D3748"/>
                 </a:solidFill>
@@ -6337,76 +6405,68 @@
                 <a:ea typeface="Arial" pitchFamily="34" charset="-122"/>
                 <a:cs typeface="Arial" pitchFamily="34" charset="-120"/>
               </a:rPr>
-              <a:t>Bedrijven maken winst</a:t>
-            </a:r>
-            <a:endParaRPr lang="en-US" sz="1700" dirty="0"/>
-          </a:p>
-        </p:txBody>
-      </p:sp>
-      <p:sp>
-        <p:nvSpPr>
-          <p:cNvPr id="5" name="Text 3"/>
-          <p:cNvSpPr/>
-          <p:nvPr/>
-        </p:nvSpPr>
-        <p:spPr>
-          <a:xfrm>
-            <a:off x="1371600" y="1691640"/>
-            <a:ext cx="6400800" cy="274320"/>
-          </a:xfrm>
-          <a:prstGeom prst="rect">
-            <a:avLst/>
-          </a:prstGeom>
-          <a:noFill/>
-          <a:ln/>
-        </p:spPr>
-        <p:txBody>
-          <a:bodyPr wrap="square" rtlCol="0" anchor="ctr"/>
-          <a:lstStyle/>
-          <a:p>
-            <a:pPr algn="ctr" indent="0" marL="0">
-              <a:buNone/>
-            </a:pPr>
-            <a:r>
-              <a:rPr lang="en-US" sz="1600" b="1" dirty="0">
-                <a:solidFill>
-                  <a:srgbClr val="1A5276"/>
-                </a:solidFill>
-                <a:latin typeface="Arial" pitchFamily="34" charset="0"/>
-                <a:ea typeface="Arial" pitchFamily="34" charset="-122"/>
-                <a:cs typeface="Arial" pitchFamily="34" charset="-120"/>
-              </a:rPr>
-              <a:t>↓</a:t>
-            </a:r>
-            <a:endParaRPr lang="en-US" sz="1600" dirty="0"/>
-          </a:p>
-        </p:txBody>
-      </p:sp>
-      <p:sp>
-        <p:nvSpPr>
-          <p:cNvPr id="6" name="Shape 4"/>
-          <p:cNvSpPr/>
-          <p:nvPr/>
-        </p:nvSpPr>
-        <p:spPr>
-          <a:xfrm>
-            <a:off x="1371600" y="1965960"/>
-            <a:ext cx="6400800" cy="594360"/>
+              <a:t>Voordeel van de consument: betaalt minder dan bereid was.
+</a:t>
+            </a:r>
+            <a:pPr algn="l" indent="0" marL="0">
+              <a:lnSpc>
+                <a:spcPct val="115000"/>
+              </a:lnSpc>
+              <a:buNone/>
+            </a:pPr>
+            <a:r>
+              <a:rPr lang="en-US" sz="1400" i="1" dirty="0">
+                <a:solidFill>
+                  <a:srgbClr val="2D3748"/>
+                </a:solidFill>
+                <a:latin typeface="Arial" pitchFamily="34" charset="0"/>
+                <a:ea typeface="Arial" pitchFamily="34" charset="-122"/>
+                <a:cs typeface="Arial" pitchFamily="34" charset="-120"/>
+              </a:rPr>
+              <a:t>Driehoek boven p*, onder V
+</a:t>
+            </a:r>
+            <a:pPr algn="l" indent="0" marL="0">
+              <a:lnSpc>
+                <a:spcPct val="115000"/>
+              </a:lnSpc>
+              <a:buNone/>
+            </a:pPr>
+            <a:r>
+              <a:rPr lang="en-US" sz="1500" b="1" dirty="0">
+                <a:solidFill>
+                  <a:srgbClr val="2D3748"/>
+                </a:solidFill>
+                <a:latin typeface="Consolas" pitchFamily="34" charset="0"/>
+                <a:ea typeface="Consolas" pitchFamily="34" charset="-122"/>
+                <a:cs typeface="Consolas" pitchFamily="34" charset="-120"/>
+              </a:rPr>
+              <a:t>½ × 200 × (50 − 30) = €2.000</a:t>
+            </a:r>
+            <a:endParaRPr lang="en-US" sz="1400" dirty="0"/>
+          </a:p>
+        </p:txBody>
+      </p:sp>
+      <p:sp>
+        <p:nvSpPr>
+          <p:cNvPr id="7" name="Shape 5"/>
+          <p:cNvSpPr/>
+          <p:nvPr/>
+        </p:nvSpPr>
+        <p:spPr>
+          <a:xfrm>
+            <a:off x="4754880" y="1005840"/>
+            <a:ext cx="3931920" cy="3017520"/>
           </a:xfrm>
           <a:prstGeom prst="rect">
             <a:avLst>
-              <a:gd name="adj" fmla="val 7692"/>
+              <a:gd name="adj" fmla="val 1515"/>
             </a:avLst>
           </a:prstGeom>
           <a:solidFill>
             <a:srgbClr val="F9F6F1"/>
           </a:solidFill>
-          <a:ln w="12700">
-            <a:solidFill>
-              <a:srgbClr val="1A5276"/>
-            </a:solidFill>
-            <a:prstDash val="solid"/>
-          </a:ln>
+          <a:ln/>
           <a:effectLst>
             <a:outerShdw sx="100000" sy="100000" kx="0" ky="0" algn="bl" rotWithShape="0" blurRad="76200" dist="25400" dir="8100000">
               <a:srgbClr val="000000">
@@ -6418,14 +6478,34 @@
       </p:sp>
       <p:sp>
         <p:nvSpPr>
-          <p:cNvPr id="7" name="Text 5"/>
-          <p:cNvSpPr/>
-          <p:nvPr/>
-        </p:nvSpPr>
-        <p:spPr>
-          <a:xfrm>
-            <a:off x="1554480" y="1965960"/>
-            <a:ext cx="6035040" cy="594360"/>
+          <p:cNvPr id="8" name="Shape 6"/>
+          <p:cNvSpPr/>
+          <p:nvPr/>
+        </p:nvSpPr>
+        <p:spPr>
+          <a:xfrm>
+            <a:off x="4754880" y="1005840"/>
+            <a:ext cx="54864" cy="3017520"/>
+          </a:xfrm>
+          <a:prstGeom prst="rect">
+            <a:avLst/>
+          </a:prstGeom>
+          <a:solidFill>
+            <a:srgbClr val="1E8449"/>
+          </a:solidFill>
+          <a:ln/>
+        </p:spPr>
+      </p:sp>
+      <p:sp>
+        <p:nvSpPr>
+          <p:cNvPr id="9" name="Text 7"/>
+          <p:cNvSpPr/>
+          <p:nvPr/>
+        </p:nvSpPr>
+        <p:spPr>
+          <a:xfrm>
+            <a:off x="4937760" y="1143000"/>
+            <a:ext cx="3611880" cy="365760"/>
           </a:xfrm>
           <a:prstGeom prst="rect">
             <a:avLst/>
@@ -6434,14 +6514,56 @@
           <a:ln/>
         </p:spPr>
         <p:txBody>
-          <a:bodyPr wrap="square" rtlCol="0" anchor="ctr"/>
+          <a:bodyPr wrap="square" rtlCol="0" anchor="t"/>
           <a:lstStyle/>
           <a:p>
             <a:pPr indent="0" marL="0">
               <a:buNone/>
             </a:pPr>
             <a:r>
-              <a:rPr lang="en-US" sz="1700" dirty="0">
+              <a:rPr lang="en-US" sz="2000" b="1" dirty="0">
+                <a:solidFill>
+                  <a:srgbClr val="1E8449"/>
+                </a:solidFill>
+                <a:latin typeface="Arial" pitchFamily="34" charset="0"/>
+                <a:ea typeface="Arial" pitchFamily="34" charset="-122"/>
+                <a:cs typeface="Arial" pitchFamily="34" charset="-120"/>
+              </a:rPr>
+              <a:t>Producentensurplus (PS)</a:t>
+            </a:r>
+            <a:endParaRPr lang="en-US" sz="2000" dirty="0"/>
+          </a:p>
+        </p:txBody>
+      </p:sp>
+      <p:sp>
+        <p:nvSpPr>
+          <p:cNvPr id="10" name="Text 8"/>
+          <p:cNvSpPr/>
+          <p:nvPr/>
+        </p:nvSpPr>
+        <p:spPr>
+          <a:xfrm>
+            <a:off x="4937760" y="1554480"/>
+            <a:ext cx="3611880" cy="2331720"/>
+          </a:xfrm>
+          <a:prstGeom prst="rect">
+            <a:avLst/>
+          </a:prstGeom>
+          <a:noFill/>
+          <a:ln/>
+        </p:spPr>
+        <p:txBody>
+          <a:bodyPr wrap="square" rtlCol="0" anchor="t"/>
+          <a:lstStyle/>
+          <a:p>
+            <a:pPr algn="l" indent="0" marL="0">
+              <a:lnSpc>
+                <a:spcPct val="115000"/>
+              </a:lnSpc>
+              <a:buNone/>
+            </a:pPr>
+            <a:r>
+              <a:rPr lang="en-US" sz="1400" dirty="0">
                 <a:solidFill>
                   <a:srgbClr val="2D3748"/>
                 </a:solidFill>
@@ -6449,111 +6571,17 @@
                 <a:ea typeface="Arial" pitchFamily="34" charset="-122"/>
                 <a:cs typeface="Arial" pitchFamily="34" charset="-120"/>
               </a:rPr>
-              <a:t>Nieuwe aanbieders treden toe</a:t>
-            </a:r>
-            <a:endParaRPr lang="en-US" sz="1700" dirty="0"/>
-          </a:p>
-        </p:txBody>
-      </p:sp>
-      <p:sp>
-        <p:nvSpPr>
-          <p:cNvPr id="8" name="Text 6"/>
-          <p:cNvSpPr/>
-          <p:nvPr/>
-        </p:nvSpPr>
-        <p:spPr>
-          <a:xfrm>
-            <a:off x="1371600" y="2560320"/>
-            <a:ext cx="6400800" cy="274320"/>
-          </a:xfrm>
-          <a:prstGeom prst="rect">
-            <a:avLst/>
-          </a:prstGeom>
-          <a:noFill/>
-          <a:ln/>
-        </p:spPr>
-        <p:txBody>
-          <a:bodyPr wrap="square" rtlCol="0" anchor="ctr"/>
-          <a:lstStyle/>
-          <a:p>
-            <a:pPr algn="ctr" indent="0" marL="0">
-              <a:buNone/>
-            </a:pPr>
-            <a:r>
-              <a:rPr lang="en-US" sz="1600" b="1" dirty="0">
-                <a:solidFill>
-                  <a:srgbClr val="1A5276"/>
-                </a:solidFill>
-                <a:latin typeface="Arial" pitchFamily="34" charset="0"/>
-                <a:ea typeface="Arial" pitchFamily="34" charset="-122"/>
-                <a:cs typeface="Arial" pitchFamily="34" charset="-120"/>
-              </a:rPr>
-              <a:t>↓</a:t>
-            </a:r>
-            <a:endParaRPr lang="en-US" sz="1600" dirty="0"/>
-          </a:p>
-        </p:txBody>
-      </p:sp>
-      <p:sp>
-        <p:nvSpPr>
-          <p:cNvPr id="9" name="Shape 7"/>
-          <p:cNvSpPr/>
-          <p:nvPr/>
-        </p:nvSpPr>
-        <p:spPr>
-          <a:xfrm>
-            <a:off x="1371600" y="2834640"/>
-            <a:ext cx="6400800" cy="594360"/>
-          </a:xfrm>
-          <a:prstGeom prst="rect">
-            <a:avLst>
-              <a:gd name="adj" fmla="val 7692"/>
-            </a:avLst>
-          </a:prstGeom>
-          <a:solidFill>
-            <a:srgbClr val="F9F6F1"/>
-          </a:solidFill>
-          <a:ln w="12700">
-            <a:solidFill>
-              <a:srgbClr val="1A5276"/>
-            </a:solidFill>
-            <a:prstDash val="solid"/>
-          </a:ln>
-          <a:effectLst>
-            <a:outerShdw sx="100000" sy="100000" kx="0" ky="0" algn="bl" rotWithShape="0" blurRad="76200" dist="25400" dir="8100000">
-              <a:srgbClr val="000000">
-                <a:alpha val="10000"/>
-              </a:srgbClr>
-            </a:outerShdw>
-          </a:effectLst>
-        </p:spPr>
-      </p:sp>
-      <p:sp>
-        <p:nvSpPr>
-          <p:cNvPr id="10" name="Text 8"/>
-          <p:cNvSpPr/>
-          <p:nvPr/>
-        </p:nvSpPr>
-        <p:spPr>
-          <a:xfrm>
-            <a:off x="1554480" y="2834640"/>
-            <a:ext cx="6035040" cy="594360"/>
-          </a:xfrm>
-          <a:prstGeom prst="rect">
-            <a:avLst/>
-          </a:prstGeom>
-          <a:noFill/>
-          <a:ln/>
-        </p:spPr>
-        <p:txBody>
-          <a:bodyPr wrap="square" rtlCol="0" anchor="ctr"/>
-          <a:lstStyle/>
-          <a:p>
-            <a:pPr indent="0" marL="0">
-              <a:buNone/>
-            </a:pPr>
-            <a:r>
-              <a:rPr lang="en-US" sz="1700" dirty="0">
+              <a:t>Voordeel van de producent: ontvangt meer dan minimale prijs.
+</a:t>
+            </a:r>
+            <a:pPr algn="l" indent="0" marL="0">
+              <a:lnSpc>
+                <a:spcPct val="115000"/>
+              </a:lnSpc>
+              <a:buNone/>
+            </a:pPr>
+            <a:r>
+              <a:rPr lang="en-US" sz="1400" i="1" dirty="0">
                 <a:solidFill>
                   <a:srgbClr val="2D3748"/>
                 </a:solidFill>
@@ -6561,160 +6589,27 @@
                 <a:ea typeface="Arial" pitchFamily="34" charset="-122"/>
                 <a:cs typeface="Arial" pitchFamily="34" charset="-120"/>
               </a:rPr>
-              <a:t>Aanbod stijgt → prijs daalt</a:t>
-            </a:r>
-            <a:endParaRPr lang="en-US" sz="1700" dirty="0"/>
-          </a:p>
-        </p:txBody>
-      </p:sp>
-      <p:sp>
-        <p:nvSpPr>
-          <p:cNvPr id="11" name="Text 9"/>
-          <p:cNvSpPr/>
-          <p:nvPr/>
-        </p:nvSpPr>
-        <p:spPr>
-          <a:xfrm>
-            <a:off x="1371600" y="3429000"/>
-            <a:ext cx="6400800" cy="274320"/>
-          </a:xfrm>
-          <a:prstGeom prst="rect">
-            <a:avLst/>
-          </a:prstGeom>
-          <a:noFill/>
-          <a:ln/>
-        </p:spPr>
-        <p:txBody>
-          <a:bodyPr wrap="square" rtlCol="0" anchor="ctr"/>
-          <a:lstStyle/>
-          <a:p>
-            <a:pPr algn="ctr" indent="0" marL="0">
-              <a:buNone/>
-            </a:pPr>
-            <a:r>
-              <a:rPr lang="en-US" sz="1600" b="1" dirty="0">
-                <a:solidFill>
-                  <a:srgbClr val="1A5276"/>
-                </a:solidFill>
-                <a:latin typeface="Arial" pitchFamily="34" charset="0"/>
-                <a:ea typeface="Arial" pitchFamily="34" charset="-122"/>
-                <a:cs typeface="Arial" pitchFamily="34" charset="-120"/>
-              </a:rPr>
-              <a:t>↓</a:t>
-            </a:r>
-            <a:endParaRPr lang="en-US" sz="1600" dirty="0"/>
-          </a:p>
-        </p:txBody>
-      </p:sp>
-      <p:sp>
-        <p:nvSpPr>
-          <p:cNvPr id="12" name="Shape 10"/>
-          <p:cNvSpPr/>
-          <p:nvPr/>
-        </p:nvSpPr>
-        <p:spPr>
-          <a:xfrm>
-            <a:off x="1371600" y="3703320"/>
-            <a:ext cx="6400800" cy="594360"/>
-          </a:xfrm>
-          <a:prstGeom prst="rect">
-            <a:avLst>
-              <a:gd name="adj" fmla="val 7692"/>
-            </a:avLst>
-          </a:prstGeom>
-          <a:solidFill>
-            <a:srgbClr val="1A5276"/>
-          </a:solidFill>
-          <a:ln w="12700">
-            <a:solidFill>
-              <a:srgbClr val="1A5276"/>
-            </a:solidFill>
-            <a:prstDash val="solid"/>
-          </a:ln>
-          <a:effectLst>
-            <a:outerShdw sx="100000" sy="100000" kx="0" ky="0" algn="bl" rotWithShape="0" blurRad="76200" dist="25400" dir="8100000">
-              <a:srgbClr val="000000">
-                <a:alpha val="10000"/>
-              </a:srgbClr>
-            </a:outerShdw>
-          </a:effectLst>
-        </p:spPr>
-      </p:sp>
-      <p:sp>
-        <p:nvSpPr>
-          <p:cNvPr id="13" name="Text 11"/>
-          <p:cNvSpPr/>
-          <p:nvPr/>
-        </p:nvSpPr>
-        <p:spPr>
-          <a:xfrm>
-            <a:off x="1554480" y="3703320"/>
-            <a:ext cx="6035040" cy="594360"/>
-          </a:xfrm>
-          <a:prstGeom prst="rect">
-            <a:avLst/>
-          </a:prstGeom>
-          <a:noFill/>
-          <a:ln/>
-        </p:spPr>
-        <p:txBody>
-          <a:bodyPr wrap="square" rtlCol="0" anchor="ctr"/>
-          <a:lstStyle/>
-          <a:p>
-            <a:pPr indent="0" marL="0">
-              <a:buNone/>
-            </a:pPr>
-            <a:r>
-              <a:rPr lang="en-US" sz="1700" b="1" dirty="0">
-                <a:solidFill>
-                  <a:srgbClr val="FFFFFF"/>
-                </a:solidFill>
-                <a:latin typeface="Arial" pitchFamily="34" charset="0"/>
-                <a:ea typeface="Arial" pitchFamily="34" charset="-122"/>
-                <a:cs typeface="Arial" pitchFamily="34" charset="-120"/>
-              </a:rPr>
-              <a:t>Winst → 0  |  p = GTKmin</a:t>
-            </a:r>
-            <a:endParaRPr lang="en-US" sz="1700" dirty="0"/>
-          </a:p>
-        </p:txBody>
-      </p:sp>
-      <p:sp>
-        <p:nvSpPr>
-          <p:cNvPr id="14" name="Text 12"/>
-          <p:cNvSpPr/>
-          <p:nvPr/>
-        </p:nvSpPr>
-        <p:spPr>
-          <a:xfrm>
-            <a:off x="640080" y="4572000"/>
-            <a:ext cx="7863840" cy="365760"/>
-          </a:xfrm>
-          <a:prstGeom prst="rect">
-            <a:avLst/>
-          </a:prstGeom>
-          <a:noFill/>
-          <a:ln/>
-        </p:spPr>
-        <p:txBody>
-          <a:bodyPr wrap="square" rtlCol="0" anchor="ctr"/>
-          <a:lstStyle/>
-          <a:p>
-            <a:pPr indent="0" marL="0">
-              <a:buNone/>
-            </a:pPr>
-            <a:r>
-              <a:rPr lang="en-US" sz="1300" i="1" dirty="0">
-                <a:solidFill>
-                  <a:srgbClr val="718096"/>
-                </a:solidFill>
-                <a:latin typeface="Arial" pitchFamily="34" charset="0"/>
-                <a:ea typeface="Arial" pitchFamily="34" charset="-122"/>
-                <a:cs typeface="Arial" pitchFamily="34" charset="-120"/>
-              </a:rPr>
-              <a:t>Op lange termijn: economische winst = 0</a:t>
-            </a:r>
-            <a:endParaRPr lang="en-US" sz="1300" dirty="0"/>
+              <a:t>Driehoek onder p*, boven A
+</a:t>
+            </a:r>
+            <a:pPr algn="l" indent="0" marL="0">
+              <a:lnSpc>
+                <a:spcPct val="115000"/>
+              </a:lnSpc>
+              <a:buNone/>
+            </a:pPr>
+            <a:r>
+              <a:rPr lang="en-US" sz="1500" b="1" dirty="0">
+                <a:solidFill>
+                  <a:srgbClr val="2D3748"/>
+                </a:solidFill>
+                <a:latin typeface="Consolas" pitchFamily="34" charset="0"/>
+                <a:ea typeface="Consolas" pitchFamily="34" charset="-122"/>
+                <a:cs typeface="Consolas" pitchFamily="34" charset="-120"/>
+              </a:rPr>
+              <a:t>½ × 200 × (30 − 10) = €2.000</a:t>
+            </a:r>
+            <a:endParaRPr lang="en-US" sz="1400" dirty="0"/>
           </a:p>
         </p:txBody>
       </p:sp>
